--- a/Lecture-13-Parallel.pptx
+++ b/Lecture-13-Parallel.pptx
@@ -5,7 +5,7 @@
     <p:sldMasterId id="2147483684" r:id="rId1"/>
   </p:sldMasterIdLst>
   <p:notesMasterIdLst>
-    <p:notesMasterId r:id="rId26"/>
+    <p:notesMasterId r:id="rId32"/>
   </p:notesMasterIdLst>
   <p:sldIdLst>
     <p:sldId id="326" r:id="rId2"/>
@@ -31,7 +31,13 @@
     <p:sldId id="325" r:id="rId22"/>
     <p:sldId id="320" r:id="rId23"/>
     <p:sldId id="304" r:id="rId24"/>
-    <p:sldId id="309" r:id="rId25"/>
+    <p:sldId id="2476" r:id="rId25"/>
+    <p:sldId id="2477" r:id="rId26"/>
+    <p:sldId id="2478" r:id="rId27"/>
+    <p:sldId id="2479" r:id="rId28"/>
+    <p:sldId id="2480" r:id="rId29"/>
+    <p:sldId id="2481" r:id="rId30"/>
+    <p:sldId id="309" r:id="rId31"/>
   </p:sldIdLst>
   <p:sldSz cx="9144000" cy="6858000" type="screen4x3"/>
   <p:notesSz cx="6858000" cy="9144000"/>
@@ -731,6 +737,944 @@
     <p:extLst>
       <p:ext uri="{BB962C8B-B14F-4D97-AF65-F5344CB8AC3E}">
         <p14:creationId xmlns:p14="http://schemas.microsoft.com/office/powerpoint/2010/main" val="3734435534"/>
+      </p:ext>
+    </p:extLst>
+  </p:cSld>
+  <p:clrMapOvr>
+    <a:masterClrMapping/>
+  </p:clrMapOvr>
+</p:notes>
+</file>
+
+<file path=ppt/notesSlides/notesSlide4.xml><?xml version="1.0" encoding="utf-8"?>
+<p:notes xmlns:a="http://schemas.openxmlformats.org/drawingml/2006/main" xmlns:r="http://schemas.openxmlformats.org/officeDocument/2006/relationships" xmlns:p="http://schemas.openxmlformats.org/presentationml/2006/main">
+  <p:cSld>
+    <p:spTree>
+      <p:nvGrpSpPr>
+        <p:cNvPr id="1" name=""/>
+        <p:cNvGrpSpPr/>
+        <p:nvPr/>
+      </p:nvGrpSpPr>
+      <p:grpSpPr>
+        <a:xfrm>
+          <a:off x="0" y="0"/>
+          <a:ext cx="0" cy="0"/>
+          <a:chOff x="0" y="0"/>
+          <a:chExt cx="0" cy="0"/>
+        </a:xfrm>
+      </p:grpSpPr>
+      <p:sp>
+        <p:nvSpPr>
+          <p:cNvPr id="2" name="Slide Image Placeholder 1"/>
+          <p:cNvSpPr>
+            <a:spLocks noGrp="1" noRot="1" noChangeAspect="1"/>
+          </p:cNvSpPr>
+          <p:nvPr>
+            <p:ph type="sldImg"/>
+          </p:nvPr>
+        </p:nvSpPr>
+        <p:spPr/>
+      </p:sp>
+      <p:sp>
+        <p:nvSpPr>
+          <p:cNvPr id="3" name="Notes Placeholder 2"/>
+          <p:cNvSpPr>
+            <a:spLocks noGrp="1"/>
+          </p:cNvSpPr>
+          <p:nvPr>
+            <p:ph type="body" idx="1"/>
+          </p:nvPr>
+        </p:nvSpPr>
+        <p:spPr/>
+        <p:txBody>
+          <a:bodyPr/>
+          <a:lstStyle/>
+          <a:p>
+            <a:r>
+              <a:rPr lang="en-US" dirty="0"/>
+              <a:t>PINNs can be scaled up by using ideas from Domain Decomposition in the solution of PDEs, e.g. FEM etc. We have already seen a variational example in Lecture 9 but here we </a:t>
+            </a:r>
+          </a:p>
+          <a:p>
+            <a:r>
+              <a:rPr lang="en-US" dirty="0" err="1"/>
+              <a:t>Consisder</a:t>
+            </a:r>
+            <a:r>
+              <a:rPr lang="en-US" dirty="0"/>
+              <a:t> the classical PINN form.</a:t>
+            </a:r>
+          </a:p>
+        </p:txBody>
+      </p:sp>
+      <p:sp>
+        <p:nvSpPr>
+          <p:cNvPr id="4" name="Slide Number Placeholder 3"/>
+          <p:cNvSpPr>
+            <a:spLocks noGrp="1"/>
+          </p:cNvSpPr>
+          <p:nvPr>
+            <p:ph type="sldNum" sz="quarter" idx="5"/>
+          </p:nvPr>
+        </p:nvSpPr>
+        <p:spPr/>
+        <p:txBody>
+          <a:bodyPr/>
+          <a:lstStyle/>
+          <a:p>
+            <a:pPr marL="0" marR="0" lvl="0" indent="0" algn="r" defTabSz="914400" rtl="0" eaLnBrk="1" fontAlgn="auto" latinLnBrk="0" hangingPunct="1">
+              <a:lnSpc>
+                <a:spcPct val="100000"/>
+              </a:lnSpc>
+              <a:spcBef>
+                <a:spcPts val="0"/>
+              </a:spcBef>
+              <a:spcAft>
+                <a:spcPts val="0"/>
+              </a:spcAft>
+              <a:buClrTx/>
+              <a:buSzTx/>
+              <a:buFontTx/>
+              <a:buNone/>
+              <a:tabLst/>
+              <a:defRPr/>
+            </a:pPr>
+            <a:fld id="{FD4CD3F8-A766-4A13-8946-C8D5E4F49586}" type="slidenum">
+              <a:rPr kumimoji="0" lang="en-US" sz="1200" b="0" i="0" u="none" strike="noStrike" kern="1200" cap="none" spc="0" normalizeH="0" baseline="0" noProof="0" smtClean="0">
+                <a:ln>
+                  <a:noFill/>
+                </a:ln>
+                <a:solidFill>
+                  <a:prstClr val="black"/>
+                </a:solidFill>
+                <a:effectLst/>
+                <a:uLnTx/>
+                <a:uFillTx/>
+                <a:latin typeface="Calibri" panose="020F0502020204030204"/>
+                <a:ea typeface="+mn-ea"/>
+                <a:cs typeface="+mn-cs"/>
+              </a:rPr>
+              <a:pPr marL="0" marR="0" lvl="0" indent="0" algn="r" defTabSz="914400" rtl="0" eaLnBrk="1" fontAlgn="auto" latinLnBrk="0" hangingPunct="1">
+                <a:lnSpc>
+                  <a:spcPct val="100000"/>
+                </a:lnSpc>
+                <a:spcBef>
+                  <a:spcPts val="0"/>
+                </a:spcBef>
+                <a:spcAft>
+                  <a:spcPts val="0"/>
+                </a:spcAft>
+                <a:buClrTx/>
+                <a:buSzTx/>
+                <a:buFontTx/>
+                <a:buNone/>
+                <a:tabLst/>
+                <a:defRPr/>
+              </a:pPr>
+              <a:t>24</a:t>
+            </a:fld>
+            <a:endParaRPr kumimoji="0" lang="en-US" sz="1200" b="0" i="0" u="none" strike="noStrike" kern="1200" cap="none" spc="0" normalizeH="0" baseline="0" noProof="0">
+              <a:ln>
+                <a:noFill/>
+              </a:ln>
+              <a:solidFill>
+                <a:prstClr val="black"/>
+              </a:solidFill>
+              <a:effectLst/>
+              <a:uLnTx/>
+              <a:uFillTx/>
+              <a:latin typeface="Calibri" panose="020F0502020204030204"/>
+              <a:ea typeface="+mn-ea"/>
+              <a:cs typeface="+mn-cs"/>
+            </a:endParaRPr>
+          </a:p>
+        </p:txBody>
+      </p:sp>
+    </p:spTree>
+    <p:extLst>
+      <p:ext uri="{BB962C8B-B14F-4D97-AF65-F5344CB8AC3E}">
+        <p14:creationId xmlns:p14="http://schemas.microsoft.com/office/powerpoint/2010/main" val="2401229000"/>
+      </p:ext>
+    </p:extLst>
+  </p:cSld>
+  <p:clrMapOvr>
+    <a:masterClrMapping/>
+  </p:clrMapOvr>
+</p:notes>
+</file>
+
+<file path=ppt/notesSlides/notesSlide5.xml><?xml version="1.0" encoding="utf-8"?>
+<p:notes xmlns:a="http://schemas.openxmlformats.org/drawingml/2006/main" xmlns:r="http://schemas.openxmlformats.org/officeDocument/2006/relationships" xmlns:p="http://schemas.openxmlformats.org/presentationml/2006/main">
+  <p:cSld>
+    <p:spTree>
+      <p:nvGrpSpPr>
+        <p:cNvPr id="1" name=""/>
+        <p:cNvGrpSpPr/>
+        <p:nvPr/>
+      </p:nvGrpSpPr>
+      <p:grpSpPr>
+        <a:xfrm>
+          <a:off x="0" y="0"/>
+          <a:ext cx="0" cy="0"/>
+          <a:chOff x="0" y="0"/>
+          <a:chExt cx="0" cy="0"/>
+        </a:xfrm>
+      </p:grpSpPr>
+      <p:sp>
+        <p:nvSpPr>
+          <p:cNvPr id="2" name="Slide Image Placeholder 1"/>
+          <p:cNvSpPr>
+            <a:spLocks noGrp="1" noRot="1" noChangeAspect="1"/>
+          </p:cNvSpPr>
+          <p:nvPr>
+            <p:ph type="sldImg"/>
+          </p:nvPr>
+        </p:nvSpPr>
+        <p:spPr/>
+      </p:sp>
+      <p:sp>
+        <p:nvSpPr>
+          <p:cNvPr id="3" name="Notes Placeholder 2"/>
+          <p:cNvSpPr>
+            <a:spLocks noGrp="1"/>
+          </p:cNvSpPr>
+          <p:nvPr>
+            <p:ph type="body" idx="1"/>
+          </p:nvPr>
+        </p:nvSpPr>
+        <p:spPr/>
+        <p:txBody>
+          <a:bodyPr/>
+          <a:lstStyle/>
+          <a:p>
+            <a:r>
+              <a:rPr lang="en-US" dirty="0"/>
+              <a:t>For conservation laws, we can get inspiration from finite volumes using fluxes at the interfaces and hence derive proper interface conditions that will be added as extra loss terms in the total</a:t>
+            </a:r>
+          </a:p>
+          <a:p>
+            <a:r>
+              <a:rPr lang="en-US" dirty="0"/>
+              <a:t>Loss function. In addition, we penalize the solution at the interface. Mimicking DG methods.</a:t>
+            </a:r>
+          </a:p>
+        </p:txBody>
+      </p:sp>
+      <p:sp>
+        <p:nvSpPr>
+          <p:cNvPr id="4" name="Slide Number Placeholder 3"/>
+          <p:cNvSpPr>
+            <a:spLocks noGrp="1"/>
+          </p:cNvSpPr>
+          <p:nvPr>
+            <p:ph type="sldNum" sz="quarter" idx="5"/>
+          </p:nvPr>
+        </p:nvSpPr>
+        <p:spPr/>
+        <p:txBody>
+          <a:bodyPr/>
+          <a:lstStyle/>
+          <a:p>
+            <a:pPr marL="0" marR="0" lvl="0" indent="0" algn="r" defTabSz="914400" rtl="0" eaLnBrk="1" fontAlgn="auto" latinLnBrk="0" hangingPunct="1">
+              <a:lnSpc>
+                <a:spcPct val="100000"/>
+              </a:lnSpc>
+              <a:spcBef>
+                <a:spcPts val="0"/>
+              </a:spcBef>
+              <a:spcAft>
+                <a:spcPts val="0"/>
+              </a:spcAft>
+              <a:buClrTx/>
+              <a:buSzTx/>
+              <a:buFontTx/>
+              <a:buNone/>
+              <a:tabLst/>
+              <a:defRPr/>
+            </a:pPr>
+            <a:fld id="{FD4CD3F8-A766-4A13-8946-C8D5E4F49586}" type="slidenum">
+              <a:rPr kumimoji="0" lang="en-US" sz="1200" b="0" i="0" u="none" strike="noStrike" kern="1200" cap="none" spc="0" normalizeH="0" baseline="0" noProof="0" smtClean="0">
+                <a:ln>
+                  <a:noFill/>
+                </a:ln>
+                <a:solidFill>
+                  <a:prstClr val="black"/>
+                </a:solidFill>
+                <a:effectLst/>
+                <a:uLnTx/>
+                <a:uFillTx/>
+                <a:latin typeface="Calibri" panose="020F0502020204030204"/>
+                <a:ea typeface="+mn-ea"/>
+                <a:cs typeface="+mn-cs"/>
+              </a:rPr>
+              <a:pPr marL="0" marR="0" lvl="0" indent="0" algn="r" defTabSz="914400" rtl="0" eaLnBrk="1" fontAlgn="auto" latinLnBrk="0" hangingPunct="1">
+                <a:lnSpc>
+                  <a:spcPct val="100000"/>
+                </a:lnSpc>
+                <a:spcBef>
+                  <a:spcPts val="0"/>
+                </a:spcBef>
+                <a:spcAft>
+                  <a:spcPts val="0"/>
+                </a:spcAft>
+                <a:buClrTx/>
+                <a:buSzTx/>
+                <a:buFontTx/>
+                <a:buNone/>
+                <a:tabLst/>
+                <a:defRPr/>
+              </a:pPr>
+              <a:t>25</a:t>
+            </a:fld>
+            <a:endParaRPr kumimoji="0" lang="en-US" sz="1200" b="0" i="0" u="none" strike="noStrike" kern="1200" cap="none" spc="0" normalizeH="0" baseline="0" noProof="0">
+              <a:ln>
+                <a:noFill/>
+              </a:ln>
+              <a:solidFill>
+                <a:prstClr val="black"/>
+              </a:solidFill>
+              <a:effectLst/>
+              <a:uLnTx/>
+              <a:uFillTx/>
+              <a:latin typeface="Calibri" panose="020F0502020204030204"/>
+              <a:ea typeface="+mn-ea"/>
+              <a:cs typeface="+mn-cs"/>
+            </a:endParaRPr>
+          </a:p>
+        </p:txBody>
+      </p:sp>
+    </p:spTree>
+    <p:extLst>
+      <p:ext uri="{BB962C8B-B14F-4D97-AF65-F5344CB8AC3E}">
+        <p14:creationId xmlns:p14="http://schemas.microsoft.com/office/powerpoint/2010/main" val="1135146594"/>
+      </p:ext>
+    </p:extLst>
+  </p:cSld>
+  <p:clrMapOvr>
+    <a:masterClrMapping/>
+  </p:clrMapOvr>
+</p:notes>
+</file>
+
+<file path=ppt/notesSlides/notesSlide6.xml><?xml version="1.0" encoding="utf-8"?>
+<p:notes xmlns:a="http://schemas.openxmlformats.org/drawingml/2006/main" xmlns:r="http://schemas.openxmlformats.org/officeDocument/2006/relationships" xmlns:p="http://schemas.openxmlformats.org/presentationml/2006/main">
+  <p:cSld>
+    <p:spTree>
+      <p:nvGrpSpPr>
+        <p:cNvPr id="1" name=""/>
+        <p:cNvGrpSpPr/>
+        <p:nvPr/>
+      </p:nvGrpSpPr>
+      <p:grpSpPr>
+        <a:xfrm>
+          <a:off x="0" y="0"/>
+          <a:ext cx="0" cy="0"/>
+          <a:chOff x="0" y="0"/>
+          <a:chExt cx="0" cy="0"/>
+        </a:xfrm>
+      </p:grpSpPr>
+      <p:sp>
+        <p:nvSpPr>
+          <p:cNvPr id="2" name="Slide Image Placeholder 1"/>
+          <p:cNvSpPr>
+            <a:spLocks noGrp="1" noRot="1" noChangeAspect="1"/>
+          </p:cNvSpPr>
+          <p:nvPr>
+            <p:ph type="sldImg"/>
+          </p:nvPr>
+        </p:nvSpPr>
+        <p:spPr/>
+      </p:sp>
+      <p:sp>
+        <p:nvSpPr>
+          <p:cNvPr id="3" name="Notes Placeholder 2"/>
+          <p:cNvSpPr>
+            <a:spLocks noGrp="1"/>
+          </p:cNvSpPr>
+          <p:nvPr>
+            <p:ph type="body" idx="1"/>
+          </p:nvPr>
+        </p:nvSpPr>
+        <p:spPr/>
+        <p:txBody>
+          <a:bodyPr/>
+          <a:lstStyle/>
+          <a:p>
+            <a:r>
+              <a:rPr lang="en-US" dirty="0"/>
+              <a:t>PINNs can be scaled up by using ideas from Domain Decomposition in the solution of PDEs, e.g. FEM etc. We have already seen a variational example in Lecture 9 but here we </a:t>
+            </a:r>
+          </a:p>
+          <a:p>
+            <a:r>
+              <a:rPr lang="en-US" dirty="0" err="1"/>
+              <a:t>Consisder</a:t>
+            </a:r>
+            <a:r>
+              <a:rPr lang="en-US" dirty="0"/>
+              <a:t> the classical PINN form.</a:t>
+            </a:r>
+          </a:p>
+        </p:txBody>
+      </p:sp>
+      <p:sp>
+        <p:nvSpPr>
+          <p:cNvPr id="4" name="Slide Number Placeholder 3"/>
+          <p:cNvSpPr>
+            <a:spLocks noGrp="1"/>
+          </p:cNvSpPr>
+          <p:nvPr>
+            <p:ph type="sldNum" sz="quarter" idx="5"/>
+          </p:nvPr>
+        </p:nvSpPr>
+        <p:spPr/>
+        <p:txBody>
+          <a:bodyPr/>
+          <a:lstStyle/>
+          <a:p>
+            <a:pPr marL="0" marR="0" lvl="0" indent="0" algn="r" defTabSz="914400" rtl="0" eaLnBrk="1" fontAlgn="auto" latinLnBrk="0" hangingPunct="1">
+              <a:lnSpc>
+                <a:spcPct val="100000"/>
+              </a:lnSpc>
+              <a:spcBef>
+                <a:spcPts val="0"/>
+              </a:spcBef>
+              <a:spcAft>
+                <a:spcPts val="0"/>
+              </a:spcAft>
+              <a:buClrTx/>
+              <a:buSzTx/>
+              <a:buFontTx/>
+              <a:buNone/>
+              <a:tabLst/>
+              <a:defRPr/>
+            </a:pPr>
+            <a:fld id="{FD4CD3F8-A766-4A13-8946-C8D5E4F49586}" type="slidenum">
+              <a:rPr kumimoji="0" lang="en-US" sz="1200" b="0" i="0" u="none" strike="noStrike" kern="1200" cap="none" spc="0" normalizeH="0" baseline="0" noProof="0" smtClean="0">
+                <a:ln>
+                  <a:noFill/>
+                </a:ln>
+                <a:solidFill>
+                  <a:prstClr val="black"/>
+                </a:solidFill>
+                <a:effectLst/>
+                <a:uLnTx/>
+                <a:uFillTx/>
+                <a:latin typeface="Calibri" panose="020F0502020204030204"/>
+                <a:ea typeface="+mn-ea"/>
+                <a:cs typeface="+mn-cs"/>
+              </a:rPr>
+              <a:pPr marL="0" marR="0" lvl="0" indent="0" algn="r" defTabSz="914400" rtl="0" eaLnBrk="1" fontAlgn="auto" latinLnBrk="0" hangingPunct="1">
+                <a:lnSpc>
+                  <a:spcPct val="100000"/>
+                </a:lnSpc>
+                <a:spcBef>
+                  <a:spcPts val="0"/>
+                </a:spcBef>
+                <a:spcAft>
+                  <a:spcPts val="0"/>
+                </a:spcAft>
+                <a:buClrTx/>
+                <a:buSzTx/>
+                <a:buFontTx/>
+                <a:buNone/>
+                <a:tabLst/>
+                <a:defRPr/>
+              </a:pPr>
+              <a:t>26</a:t>
+            </a:fld>
+            <a:endParaRPr kumimoji="0" lang="en-US" sz="1200" b="0" i="0" u="none" strike="noStrike" kern="1200" cap="none" spc="0" normalizeH="0" baseline="0" noProof="0">
+              <a:ln>
+                <a:noFill/>
+              </a:ln>
+              <a:solidFill>
+                <a:prstClr val="black"/>
+              </a:solidFill>
+              <a:effectLst/>
+              <a:uLnTx/>
+              <a:uFillTx/>
+              <a:latin typeface="Calibri" panose="020F0502020204030204"/>
+              <a:ea typeface="+mn-ea"/>
+              <a:cs typeface="+mn-cs"/>
+            </a:endParaRPr>
+          </a:p>
+        </p:txBody>
+      </p:sp>
+    </p:spTree>
+    <p:extLst>
+      <p:ext uri="{BB962C8B-B14F-4D97-AF65-F5344CB8AC3E}">
+        <p14:creationId xmlns:p14="http://schemas.microsoft.com/office/powerpoint/2010/main" val="860948"/>
+      </p:ext>
+    </p:extLst>
+  </p:cSld>
+  <p:clrMapOvr>
+    <a:masterClrMapping/>
+  </p:clrMapOvr>
+</p:notes>
+</file>
+
+<file path=ppt/notesSlides/notesSlide7.xml><?xml version="1.0" encoding="utf-8"?>
+<p:notes xmlns:a="http://schemas.openxmlformats.org/drawingml/2006/main" xmlns:r="http://schemas.openxmlformats.org/officeDocument/2006/relationships" xmlns:p="http://schemas.openxmlformats.org/presentationml/2006/main">
+  <p:cSld>
+    <p:spTree>
+      <p:nvGrpSpPr>
+        <p:cNvPr id="1" name=""/>
+        <p:cNvGrpSpPr/>
+        <p:nvPr/>
+      </p:nvGrpSpPr>
+      <p:grpSpPr>
+        <a:xfrm>
+          <a:off x="0" y="0"/>
+          <a:ext cx="0" cy="0"/>
+          <a:chOff x="0" y="0"/>
+          <a:chExt cx="0" cy="0"/>
+        </a:xfrm>
+      </p:grpSpPr>
+      <p:sp>
+        <p:nvSpPr>
+          <p:cNvPr id="2" name="Slide Image Placeholder 1"/>
+          <p:cNvSpPr>
+            <a:spLocks noGrp="1" noRot="1" noChangeAspect="1"/>
+          </p:cNvSpPr>
+          <p:nvPr>
+            <p:ph type="sldImg"/>
+          </p:nvPr>
+        </p:nvSpPr>
+        <p:spPr/>
+      </p:sp>
+      <p:sp>
+        <p:nvSpPr>
+          <p:cNvPr id="3" name="Notes Placeholder 2"/>
+          <p:cNvSpPr>
+            <a:spLocks noGrp="1"/>
+          </p:cNvSpPr>
+          <p:nvPr>
+            <p:ph type="body" idx="1"/>
+          </p:nvPr>
+        </p:nvSpPr>
+        <p:spPr/>
+        <p:txBody>
+          <a:bodyPr/>
+          <a:lstStyle/>
+          <a:p>
+            <a:r>
+              <a:rPr lang="en-US" dirty="0"/>
+              <a:t>PINNs can be scaled up by using ideas from Domain Decomposition in the solution of PDEs, e.g. FEM etc. We have already seen a variational example in Lecture 9 but here we </a:t>
+            </a:r>
+          </a:p>
+          <a:p>
+            <a:r>
+              <a:rPr lang="en-US" dirty="0" err="1"/>
+              <a:t>Consisder</a:t>
+            </a:r>
+            <a:r>
+              <a:rPr lang="en-US" dirty="0"/>
+              <a:t> the classical PINN form.</a:t>
+            </a:r>
+          </a:p>
+        </p:txBody>
+      </p:sp>
+      <p:sp>
+        <p:nvSpPr>
+          <p:cNvPr id="4" name="Slide Number Placeholder 3"/>
+          <p:cNvSpPr>
+            <a:spLocks noGrp="1"/>
+          </p:cNvSpPr>
+          <p:nvPr>
+            <p:ph type="sldNum" sz="quarter" idx="5"/>
+          </p:nvPr>
+        </p:nvSpPr>
+        <p:spPr/>
+        <p:txBody>
+          <a:bodyPr/>
+          <a:lstStyle/>
+          <a:p>
+            <a:pPr marL="0" marR="0" lvl="0" indent="0" algn="r" defTabSz="914400" rtl="0" eaLnBrk="1" fontAlgn="auto" latinLnBrk="0" hangingPunct="1">
+              <a:lnSpc>
+                <a:spcPct val="100000"/>
+              </a:lnSpc>
+              <a:spcBef>
+                <a:spcPts val="0"/>
+              </a:spcBef>
+              <a:spcAft>
+                <a:spcPts val="0"/>
+              </a:spcAft>
+              <a:buClrTx/>
+              <a:buSzTx/>
+              <a:buFontTx/>
+              <a:buNone/>
+              <a:tabLst/>
+              <a:defRPr/>
+            </a:pPr>
+            <a:fld id="{FD4CD3F8-A766-4A13-8946-C8D5E4F49586}" type="slidenum">
+              <a:rPr kumimoji="0" lang="en-US" sz="1200" b="0" i="0" u="none" strike="noStrike" kern="1200" cap="none" spc="0" normalizeH="0" baseline="0" noProof="0" smtClean="0">
+                <a:ln>
+                  <a:noFill/>
+                </a:ln>
+                <a:solidFill>
+                  <a:prstClr val="black"/>
+                </a:solidFill>
+                <a:effectLst/>
+                <a:uLnTx/>
+                <a:uFillTx/>
+                <a:latin typeface="Calibri" panose="020F0502020204030204"/>
+                <a:ea typeface="+mn-ea"/>
+                <a:cs typeface="+mn-cs"/>
+              </a:rPr>
+              <a:pPr marL="0" marR="0" lvl="0" indent="0" algn="r" defTabSz="914400" rtl="0" eaLnBrk="1" fontAlgn="auto" latinLnBrk="0" hangingPunct="1">
+                <a:lnSpc>
+                  <a:spcPct val="100000"/>
+                </a:lnSpc>
+                <a:spcBef>
+                  <a:spcPts val="0"/>
+                </a:spcBef>
+                <a:spcAft>
+                  <a:spcPts val="0"/>
+                </a:spcAft>
+                <a:buClrTx/>
+                <a:buSzTx/>
+                <a:buFontTx/>
+                <a:buNone/>
+                <a:tabLst/>
+                <a:defRPr/>
+              </a:pPr>
+              <a:t>27</a:t>
+            </a:fld>
+            <a:endParaRPr kumimoji="0" lang="en-US" sz="1200" b="0" i="0" u="none" strike="noStrike" kern="1200" cap="none" spc="0" normalizeH="0" baseline="0" noProof="0">
+              <a:ln>
+                <a:noFill/>
+              </a:ln>
+              <a:solidFill>
+                <a:prstClr val="black"/>
+              </a:solidFill>
+              <a:effectLst/>
+              <a:uLnTx/>
+              <a:uFillTx/>
+              <a:latin typeface="Calibri" panose="020F0502020204030204"/>
+              <a:ea typeface="+mn-ea"/>
+              <a:cs typeface="+mn-cs"/>
+            </a:endParaRPr>
+          </a:p>
+        </p:txBody>
+      </p:sp>
+    </p:spTree>
+    <p:extLst>
+      <p:ext uri="{BB962C8B-B14F-4D97-AF65-F5344CB8AC3E}">
+        <p14:creationId xmlns:p14="http://schemas.microsoft.com/office/powerpoint/2010/main" val="1633482674"/>
+      </p:ext>
+    </p:extLst>
+  </p:cSld>
+  <p:clrMapOvr>
+    <a:masterClrMapping/>
+  </p:clrMapOvr>
+</p:notes>
+</file>
+
+<file path=ppt/notesSlides/notesSlide8.xml><?xml version="1.0" encoding="utf-8"?>
+<p:notes xmlns:a="http://schemas.openxmlformats.org/drawingml/2006/main" xmlns:r="http://schemas.openxmlformats.org/officeDocument/2006/relationships" xmlns:p="http://schemas.openxmlformats.org/presentationml/2006/main">
+  <p:cSld>
+    <p:spTree>
+      <p:nvGrpSpPr>
+        <p:cNvPr id="1" name=""/>
+        <p:cNvGrpSpPr/>
+        <p:nvPr/>
+      </p:nvGrpSpPr>
+      <p:grpSpPr>
+        <a:xfrm>
+          <a:off x="0" y="0"/>
+          <a:ext cx="0" cy="0"/>
+          <a:chOff x="0" y="0"/>
+          <a:chExt cx="0" cy="0"/>
+        </a:xfrm>
+      </p:grpSpPr>
+      <p:sp>
+        <p:nvSpPr>
+          <p:cNvPr id="2" name="Slide Image Placeholder 1"/>
+          <p:cNvSpPr>
+            <a:spLocks noGrp="1" noRot="1" noChangeAspect="1"/>
+          </p:cNvSpPr>
+          <p:nvPr>
+            <p:ph type="sldImg"/>
+          </p:nvPr>
+        </p:nvSpPr>
+        <p:spPr/>
+      </p:sp>
+      <p:sp>
+        <p:nvSpPr>
+          <p:cNvPr id="3" name="Notes Placeholder 2"/>
+          <p:cNvSpPr>
+            <a:spLocks noGrp="1"/>
+          </p:cNvSpPr>
+          <p:nvPr>
+            <p:ph type="body" idx="1"/>
+          </p:nvPr>
+        </p:nvSpPr>
+        <p:spPr/>
+        <p:txBody>
+          <a:bodyPr/>
+          <a:lstStyle/>
+          <a:p>
+            <a:r>
+              <a:rPr lang="en-US" dirty="0"/>
+              <a:t>PINNs can be scaled up by using ideas from Domain Decomposition in the solution of PDEs, e.g. FEM etc. We have already seen a variational example in Lecture 9 but here we </a:t>
+            </a:r>
+          </a:p>
+          <a:p>
+            <a:r>
+              <a:rPr lang="en-US" dirty="0" err="1"/>
+              <a:t>Consisder</a:t>
+            </a:r>
+            <a:r>
+              <a:rPr lang="en-US" dirty="0"/>
+              <a:t> the classical PINN form.</a:t>
+            </a:r>
+          </a:p>
+        </p:txBody>
+      </p:sp>
+      <p:sp>
+        <p:nvSpPr>
+          <p:cNvPr id="4" name="Slide Number Placeholder 3"/>
+          <p:cNvSpPr>
+            <a:spLocks noGrp="1"/>
+          </p:cNvSpPr>
+          <p:nvPr>
+            <p:ph type="sldNum" sz="quarter" idx="5"/>
+          </p:nvPr>
+        </p:nvSpPr>
+        <p:spPr/>
+        <p:txBody>
+          <a:bodyPr/>
+          <a:lstStyle/>
+          <a:p>
+            <a:pPr marL="0" marR="0" lvl="0" indent="0" algn="r" defTabSz="914400" rtl="0" eaLnBrk="1" fontAlgn="auto" latinLnBrk="0" hangingPunct="1">
+              <a:lnSpc>
+                <a:spcPct val="100000"/>
+              </a:lnSpc>
+              <a:spcBef>
+                <a:spcPts val="0"/>
+              </a:spcBef>
+              <a:spcAft>
+                <a:spcPts val="0"/>
+              </a:spcAft>
+              <a:buClrTx/>
+              <a:buSzTx/>
+              <a:buFontTx/>
+              <a:buNone/>
+              <a:tabLst/>
+              <a:defRPr/>
+            </a:pPr>
+            <a:fld id="{FD4CD3F8-A766-4A13-8946-C8D5E4F49586}" type="slidenum">
+              <a:rPr kumimoji="0" lang="en-US" sz="1200" b="0" i="0" u="none" strike="noStrike" kern="1200" cap="none" spc="0" normalizeH="0" baseline="0" noProof="0" smtClean="0">
+                <a:ln>
+                  <a:noFill/>
+                </a:ln>
+                <a:solidFill>
+                  <a:prstClr val="black"/>
+                </a:solidFill>
+                <a:effectLst/>
+                <a:uLnTx/>
+                <a:uFillTx/>
+                <a:latin typeface="Calibri" panose="020F0502020204030204"/>
+                <a:ea typeface="+mn-ea"/>
+                <a:cs typeface="+mn-cs"/>
+              </a:rPr>
+              <a:pPr marL="0" marR="0" lvl="0" indent="0" algn="r" defTabSz="914400" rtl="0" eaLnBrk="1" fontAlgn="auto" latinLnBrk="0" hangingPunct="1">
+                <a:lnSpc>
+                  <a:spcPct val="100000"/>
+                </a:lnSpc>
+                <a:spcBef>
+                  <a:spcPts val="0"/>
+                </a:spcBef>
+                <a:spcAft>
+                  <a:spcPts val="0"/>
+                </a:spcAft>
+                <a:buClrTx/>
+                <a:buSzTx/>
+                <a:buFontTx/>
+                <a:buNone/>
+                <a:tabLst/>
+                <a:defRPr/>
+              </a:pPr>
+              <a:t>28</a:t>
+            </a:fld>
+            <a:endParaRPr kumimoji="0" lang="en-US" sz="1200" b="0" i="0" u="none" strike="noStrike" kern="1200" cap="none" spc="0" normalizeH="0" baseline="0" noProof="0">
+              <a:ln>
+                <a:noFill/>
+              </a:ln>
+              <a:solidFill>
+                <a:prstClr val="black"/>
+              </a:solidFill>
+              <a:effectLst/>
+              <a:uLnTx/>
+              <a:uFillTx/>
+              <a:latin typeface="Calibri" panose="020F0502020204030204"/>
+              <a:ea typeface="+mn-ea"/>
+              <a:cs typeface="+mn-cs"/>
+            </a:endParaRPr>
+          </a:p>
+        </p:txBody>
+      </p:sp>
+    </p:spTree>
+    <p:extLst>
+      <p:ext uri="{BB962C8B-B14F-4D97-AF65-F5344CB8AC3E}">
+        <p14:creationId xmlns:p14="http://schemas.microsoft.com/office/powerpoint/2010/main" val="657186034"/>
+      </p:ext>
+    </p:extLst>
+  </p:cSld>
+  <p:clrMapOvr>
+    <a:masterClrMapping/>
+  </p:clrMapOvr>
+</p:notes>
+</file>
+
+<file path=ppt/notesSlides/notesSlide9.xml><?xml version="1.0" encoding="utf-8"?>
+<p:notes xmlns:a="http://schemas.openxmlformats.org/drawingml/2006/main" xmlns:r="http://schemas.openxmlformats.org/officeDocument/2006/relationships" xmlns:p="http://schemas.openxmlformats.org/presentationml/2006/main">
+  <p:cSld>
+    <p:spTree>
+      <p:nvGrpSpPr>
+        <p:cNvPr id="1" name=""/>
+        <p:cNvGrpSpPr/>
+        <p:nvPr/>
+      </p:nvGrpSpPr>
+      <p:grpSpPr>
+        <a:xfrm>
+          <a:off x="0" y="0"/>
+          <a:ext cx="0" cy="0"/>
+          <a:chOff x="0" y="0"/>
+          <a:chExt cx="0" cy="0"/>
+        </a:xfrm>
+      </p:grpSpPr>
+      <p:sp>
+        <p:nvSpPr>
+          <p:cNvPr id="2" name="Slide Image Placeholder 1"/>
+          <p:cNvSpPr>
+            <a:spLocks noGrp="1" noRot="1" noChangeAspect="1"/>
+          </p:cNvSpPr>
+          <p:nvPr>
+            <p:ph type="sldImg"/>
+          </p:nvPr>
+        </p:nvSpPr>
+        <p:spPr/>
+      </p:sp>
+      <p:sp>
+        <p:nvSpPr>
+          <p:cNvPr id="3" name="Notes Placeholder 2"/>
+          <p:cNvSpPr>
+            <a:spLocks noGrp="1"/>
+          </p:cNvSpPr>
+          <p:nvPr>
+            <p:ph type="body" idx="1"/>
+          </p:nvPr>
+        </p:nvSpPr>
+        <p:spPr/>
+        <p:txBody>
+          <a:bodyPr/>
+          <a:lstStyle/>
+          <a:p>
+            <a:r>
+              <a:rPr lang="en-US" dirty="0"/>
+              <a:t>PINNs can be scaled up by using ideas from Domain Decomposition in the solution of PDEs, e.g. FEM etc. We have already seen a variational example in Lecture 9 but here we </a:t>
+            </a:r>
+          </a:p>
+          <a:p>
+            <a:r>
+              <a:rPr lang="en-US" dirty="0" err="1"/>
+              <a:t>Consisder</a:t>
+            </a:r>
+            <a:r>
+              <a:rPr lang="en-US" dirty="0"/>
+              <a:t> the classical PINN form.</a:t>
+            </a:r>
+          </a:p>
+        </p:txBody>
+      </p:sp>
+      <p:sp>
+        <p:nvSpPr>
+          <p:cNvPr id="4" name="Slide Number Placeholder 3"/>
+          <p:cNvSpPr>
+            <a:spLocks noGrp="1"/>
+          </p:cNvSpPr>
+          <p:nvPr>
+            <p:ph type="sldNum" sz="quarter" idx="5"/>
+          </p:nvPr>
+        </p:nvSpPr>
+        <p:spPr/>
+        <p:txBody>
+          <a:bodyPr/>
+          <a:lstStyle/>
+          <a:p>
+            <a:pPr marL="0" marR="0" lvl="0" indent="0" algn="r" defTabSz="914400" rtl="0" eaLnBrk="1" fontAlgn="auto" latinLnBrk="0" hangingPunct="1">
+              <a:lnSpc>
+                <a:spcPct val="100000"/>
+              </a:lnSpc>
+              <a:spcBef>
+                <a:spcPts val="0"/>
+              </a:spcBef>
+              <a:spcAft>
+                <a:spcPts val="0"/>
+              </a:spcAft>
+              <a:buClrTx/>
+              <a:buSzTx/>
+              <a:buFontTx/>
+              <a:buNone/>
+              <a:tabLst/>
+              <a:defRPr/>
+            </a:pPr>
+            <a:fld id="{FD4CD3F8-A766-4A13-8946-C8D5E4F49586}" type="slidenum">
+              <a:rPr kumimoji="0" lang="en-US" sz="1200" b="0" i="0" u="none" strike="noStrike" kern="1200" cap="none" spc="0" normalizeH="0" baseline="0" noProof="0" smtClean="0">
+                <a:ln>
+                  <a:noFill/>
+                </a:ln>
+                <a:solidFill>
+                  <a:prstClr val="black"/>
+                </a:solidFill>
+                <a:effectLst/>
+                <a:uLnTx/>
+                <a:uFillTx/>
+                <a:latin typeface="Calibri" panose="020F0502020204030204"/>
+                <a:ea typeface="+mn-ea"/>
+                <a:cs typeface="+mn-cs"/>
+              </a:rPr>
+              <a:pPr marL="0" marR="0" lvl="0" indent="0" algn="r" defTabSz="914400" rtl="0" eaLnBrk="1" fontAlgn="auto" latinLnBrk="0" hangingPunct="1">
+                <a:lnSpc>
+                  <a:spcPct val="100000"/>
+                </a:lnSpc>
+                <a:spcBef>
+                  <a:spcPts val="0"/>
+                </a:spcBef>
+                <a:spcAft>
+                  <a:spcPts val="0"/>
+                </a:spcAft>
+                <a:buClrTx/>
+                <a:buSzTx/>
+                <a:buFontTx/>
+                <a:buNone/>
+                <a:tabLst/>
+                <a:defRPr/>
+              </a:pPr>
+              <a:t>29</a:t>
+            </a:fld>
+            <a:endParaRPr kumimoji="0" lang="en-US" sz="1200" b="0" i="0" u="none" strike="noStrike" kern="1200" cap="none" spc="0" normalizeH="0" baseline="0" noProof="0">
+              <a:ln>
+                <a:noFill/>
+              </a:ln>
+              <a:solidFill>
+                <a:prstClr val="black"/>
+              </a:solidFill>
+              <a:effectLst/>
+              <a:uLnTx/>
+              <a:uFillTx/>
+              <a:latin typeface="Calibri" panose="020F0502020204030204"/>
+              <a:ea typeface="+mn-ea"/>
+              <a:cs typeface="+mn-cs"/>
+            </a:endParaRPr>
+          </a:p>
+        </p:txBody>
+      </p:sp>
+    </p:spTree>
+    <p:extLst>
+      <p:ext uri="{BB962C8B-B14F-4D97-AF65-F5344CB8AC3E}">
+        <p14:creationId xmlns:p14="http://schemas.microsoft.com/office/powerpoint/2010/main" val="1970498500"/>
       </p:ext>
     </p:extLst>
   </p:cSld>
@@ -18417,47 +19361,94 @@
       </p:grpSpPr>
       <p:sp>
         <p:nvSpPr>
-          <p:cNvPr id="4" name="文本框 3"/>
-          <p:cNvSpPr txBox="1"/>
+          <p:cNvPr id="3" name="Slide Number Placeholder 2">
+            <a:extLst>
+              <a:ext uri="{FF2B5EF4-FFF2-40B4-BE49-F238E27FC236}">
+                <a16:creationId xmlns:a16="http://schemas.microsoft.com/office/drawing/2014/main" id="{3D414C2D-8A45-4ABD-8CDC-4E1AB5D68212}"/>
+              </a:ext>
+            </a:extLst>
+          </p:cNvPr>
+          <p:cNvSpPr>
+            <a:spLocks noGrp="1"/>
+          </p:cNvSpPr>
+          <p:nvPr>
+            <p:ph type="sldNum" sz="quarter" idx="12"/>
+          </p:nvPr>
+        </p:nvSpPr>
+        <p:spPr/>
+        <p:txBody>
+          <a:bodyPr/>
+          <a:lstStyle/>
+          <a:p>
+            <a:pPr algn="l" defTabSz="685800">
+              <a:defRPr/>
+            </a:pPr>
+            <a:fld id="{5DEF7F31-0B8A-474A-B86C-91F381754329}" type="slidenum">
+              <a:rPr lang="en-US" sz="1350">
+                <a:solidFill>
+                  <a:srgbClr val="FFFFFF"/>
+                </a:solidFill>
+                <a:latin typeface="Trebuchet MS"/>
+              </a:rPr>
+              <a:pPr algn="l" defTabSz="685800">
+                <a:defRPr/>
+              </a:pPr>
+              <a:t>24</a:t>
+            </a:fld>
+            <a:endParaRPr lang="en-US" sz="1350" dirty="0">
+              <a:solidFill>
+                <a:srgbClr val="FFFFFF"/>
+              </a:solidFill>
+              <a:latin typeface="Trebuchet MS"/>
+            </a:endParaRPr>
+          </a:p>
+        </p:txBody>
+      </p:sp>
+      <p:pic>
+        <p:nvPicPr>
+          <p:cNvPr id="4" name="Picture 3">
+            <a:extLst>
+              <a:ext uri="{FF2B5EF4-FFF2-40B4-BE49-F238E27FC236}">
+                <a16:creationId xmlns:a16="http://schemas.microsoft.com/office/drawing/2014/main" id="{89ADBB72-DAAA-4E09-9EDD-F6EBE394CACA}"/>
+              </a:ext>
+            </a:extLst>
+          </p:cNvPr>
+          <p:cNvPicPr>
+            <a:picLocks noChangeAspect="1"/>
+          </p:cNvPicPr>
           <p:nvPr/>
-        </p:nvSpPr>
+        </p:nvPicPr>
+        <p:blipFill rotWithShape="1">
+          <a:blip r:embed="rId4"/>
+          <a:srcRect l="25376" t="9301" r="26051" b="64503"/>
+          <a:stretch/>
+        </p:blipFill>
         <p:spPr>
           <a:xfrm>
-            <a:off x="0" y="2854036"/>
-            <a:ext cx="9144000" cy="646331"/>
+            <a:off x="4845776" y="1955246"/>
+            <a:ext cx="4210440" cy="1700213"/>
           </a:xfrm>
           <a:prstGeom prst="rect">
             <a:avLst/>
           </a:prstGeom>
-          <a:noFill/>
         </p:spPr>
-        <p:txBody>
-          <a:bodyPr wrap="square" rtlCol="0">
-            <a:spAutoFit/>
-          </a:bodyPr>
-          <a:lstStyle/>
-          <a:p>
-            <a:pPr algn="ctr"/>
-            <a:r>
-              <a:rPr lang="en-US" sz="3600" b="1" dirty="0">
-                <a:latin typeface="Microsoft YaHei UI" panose="020B0503020204020204" pitchFamily="34" charset="-122"/>
-                <a:ea typeface="Microsoft YaHei UI" panose="020B0503020204020204" pitchFamily="34" charset="-122"/>
-              </a:rPr>
-              <a:t>Thank you!</a:t>
-            </a:r>
-          </a:p>
-        </p:txBody>
-      </p:sp>
+      </p:pic>
       <p:pic>
         <p:nvPicPr>
-          <p:cNvPr id="9" name="图片 8"/>
+          <p:cNvPr id="6" name="Picture 5" descr="Diagram&#10;&#10;Description automatically generated">
+            <a:extLst>
+              <a:ext uri="{FF2B5EF4-FFF2-40B4-BE49-F238E27FC236}">
+                <a16:creationId xmlns:a16="http://schemas.microsoft.com/office/drawing/2014/main" id="{85A89996-82FE-4103-BD05-ADCF3E7537D4}"/>
+              </a:ext>
+            </a:extLst>
+          </p:cNvPr>
           <p:cNvPicPr>
             <a:picLocks noChangeAspect="1"/>
           </p:cNvPicPr>
           <p:nvPr/>
         </p:nvPicPr>
         <p:blipFill>
-          <a:blip r:embed="rId2" cstate="print">
+          <a:blip r:embed="rId5">
             <a:extLst>
               <a:ext uri="{28A0092B-C50C-407E-A947-70E740481C1C}">
                 <a14:useLocalDpi xmlns:a14="http://schemas.microsoft.com/office/drawing/2010/main" val="0"/>
@@ -18470,8 +19461,1968 @@
         </p:blipFill>
         <p:spPr>
           <a:xfrm>
-            <a:off x="8054111" y="5781964"/>
-            <a:ext cx="1076036" cy="1076036"/>
+            <a:off x="128097" y="1714585"/>
+            <a:ext cx="4717679" cy="2638426"/>
+          </a:xfrm>
+          <a:prstGeom prst="rect">
+            <a:avLst/>
+          </a:prstGeom>
+        </p:spPr>
+      </p:pic>
+      <p:pic>
+        <p:nvPicPr>
+          <p:cNvPr id="10" name="Picture 9" descr="\documentclass{article}&#10;\usepackage[a4paper, total={6in, 8in}]{geometry}&#10;\usepackage{amsmath}&#10;\usepackage{amssymb}&#10;\usepackage{xcolor}&#10;\usepackage{graphicx}&#10;&#10;\pagestyle{empty}&#10;\begin{document}&#10;&#10;&#10;\[ \mathcal{L}(\tilde{\Theta})=\frac{1}{N_{u}} \sum_{i=1}^{N_{u}}\left|u_{\text {target }}^{i}-u_{\tilde{\Theta}}\left(x_{i}^{u}\right)\right|^{2}+\frac{1}{N_{f}} \sum_{i=1}^{N_{f}}\left|\mathcal{F}_{\tilde{\Theta}}\left(x_{i}^{f}\right)\right|^{2}+\text { {\color{red}Interface Loss} } \]&#10;&#10;&#10;\end{document}&#10;" title="IguanaTex Bitmap Display">
+            <a:extLst>
+              <a:ext uri="{FF2B5EF4-FFF2-40B4-BE49-F238E27FC236}">
+                <a16:creationId xmlns:a16="http://schemas.microsoft.com/office/drawing/2014/main" id="{66DB8E89-821E-4F01-9F61-ADFDDE43B964}"/>
+              </a:ext>
+            </a:extLst>
+          </p:cNvPr>
+          <p:cNvPicPr>
+            <a:picLocks noChangeAspect="1"/>
+          </p:cNvPicPr>
+          <p:nvPr>
+            <p:custDataLst>
+              <p:tags r:id="rId1"/>
+            </p:custDataLst>
+          </p:nvPr>
+        </p:nvPicPr>
+        <p:blipFill>
+          <a:blip r:embed="rId6" cstate="print">
+            <a:extLst>
+              <a:ext uri="{28A0092B-C50C-407E-A947-70E740481C1C}">
+                <a14:useLocalDpi xmlns:a14="http://schemas.microsoft.com/office/drawing/2010/main" val="0"/>
+              </a:ext>
+            </a:extLst>
+          </a:blip>
+          <a:stretch>
+            <a:fillRect/>
+          </a:stretch>
+        </p:blipFill>
+        <p:spPr>
+          <a:xfrm>
+            <a:off x="1482285" y="4677256"/>
+            <a:ext cx="6179429" cy="573714"/>
+          </a:xfrm>
+          <a:prstGeom prst="rect">
+            <a:avLst/>
+          </a:prstGeom>
+        </p:spPr>
+      </p:pic>
+      <p:sp>
+        <p:nvSpPr>
+          <p:cNvPr id="2" name="圆角矩形 7">
+            <a:extLst>
+              <a:ext uri="{FF2B5EF4-FFF2-40B4-BE49-F238E27FC236}">
+                <a16:creationId xmlns:a16="http://schemas.microsoft.com/office/drawing/2014/main" id="{5B7F6C37-B15C-02AA-C4BA-A6533F3F8CA8}"/>
+              </a:ext>
+            </a:extLst>
+          </p:cNvPr>
+          <p:cNvSpPr/>
+          <p:nvPr/>
+        </p:nvSpPr>
+        <p:spPr>
+          <a:xfrm>
+            <a:off x="0" y="0"/>
+            <a:ext cx="9144000" cy="756138"/>
+          </a:xfrm>
+          <a:prstGeom prst="roundRect">
+            <a:avLst/>
+          </a:prstGeom>
+          <a:solidFill>
+            <a:schemeClr val="bg2"/>
+          </a:solidFill>
+          <a:ln>
+            <a:solidFill>
+              <a:schemeClr val="tx1">
+                <a:lumMod val="50000"/>
+                <a:lumOff val="50000"/>
+              </a:schemeClr>
+            </a:solidFill>
+          </a:ln>
+        </p:spPr>
+        <p:style>
+          <a:lnRef idx="2">
+            <a:schemeClr val="accent1">
+              <a:shade val="50000"/>
+            </a:schemeClr>
+          </a:lnRef>
+          <a:fillRef idx="1">
+            <a:schemeClr val="accent1"/>
+          </a:fillRef>
+          <a:effectRef idx="0">
+            <a:schemeClr val="accent1"/>
+          </a:effectRef>
+          <a:fontRef idx="minor">
+            <a:schemeClr val="lt1"/>
+          </a:fontRef>
+        </p:style>
+        <p:txBody>
+          <a:bodyPr rtlCol="0" anchor="ctr"/>
+          <a:lstStyle/>
+          <a:p>
+            <a:pPr defTabSz="685800">
+              <a:lnSpc>
+                <a:spcPct val="90000"/>
+              </a:lnSpc>
+              <a:defRPr/>
+            </a:pPr>
+            <a:r>
+              <a:rPr lang="en-IN" altLang="zh-CN" sz="2400" b="1" dirty="0">
+                <a:solidFill>
+                  <a:srgbClr val="C00000"/>
+                </a:solidFill>
+                <a:latin typeface="Arial" panose="020B0604020202020204" pitchFamily="34" charset="0"/>
+                <a:cs typeface="Arial" panose="020B0604020202020204" pitchFamily="34" charset="0"/>
+              </a:rPr>
+              <a:t>Nonoverlapping Domain Decomposition</a:t>
+            </a:r>
+          </a:p>
+        </p:txBody>
+      </p:sp>
+    </p:spTree>
+    <p:extLst>
+      <p:ext uri="{BB962C8B-B14F-4D97-AF65-F5344CB8AC3E}">
+        <p14:creationId xmlns:p14="http://schemas.microsoft.com/office/powerpoint/2010/main" val="351467369"/>
+      </p:ext>
+    </p:extLst>
+  </p:cSld>
+  <p:clrMapOvr>
+    <a:masterClrMapping/>
+  </p:clrMapOvr>
+</p:sld>
+</file>
+
+<file path=ppt/slides/slide25.xml><?xml version="1.0" encoding="utf-8"?>
+<p:sld xmlns:a="http://schemas.openxmlformats.org/drawingml/2006/main" xmlns:r="http://schemas.openxmlformats.org/officeDocument/2006/relationships" xmlns:p="http://schemas.openxmlformats.org/presentationml/2006/main">
+  <p:cSld>
+    <p:spTree>
+      <p:nvGrpSpPr>
+        <p:cNvPr id="1" name=""/>
+        <p:cNvGrpSpPr/>
+        <p:nvPr/>
+      </p:nvGrpSpPr>
+      <p:grpSpPr>
+        <a:xfrm>
+          <a:off x="0" y="0"/>
+          <a:ext cx="0" cy="0"/>
+          <a:chOff x="0" y="0"/>
+          <a:chExt cx="0" cy="0"/>
+        </a:xfrm>
+      </p:grpSpPr>
+      <p:sp>
+        <p:nvSpPr>
+          <p:cNvPr id="3" name="Slide Number Placeholder 2">
+            <a:extLst>
+              <a:ext uri="{FF2B5EF4-FFF2-40B4-BE49-F238E27FC236}">
+                <a16:creationId xmlns:a16="http://schemas.microsoft.com/office/drawing/2014/main" id="{402DA246-5EBB-4F04-895B-9843A60AF2F7}"/>
+              </a:ext>
+            </a:extLst>
+          </p:cNvPr>
+          <p:cNvSpPr>
+            <a:spLocks noGrp="1"/>
+          </p:cNvSpPr>
+          <p:nvPr>
+            <p:ph type="sldNum" sz="quarter" idx="12"/>
+          </p:nvPr>
+        </p:nvSpPr>
+        <p:spPr/>
+        <p:txBody>
+          <a:bodyPr/>
+          <a:lstStyle/>
+          <a:p>
+            <a:pPr algn="l" defTabSz="685800">
+              <a:defRPr/>
+            </a:pPr>
+            <a:fld id="{5DEF7F31-0B8A-474A-B86C-91F381754329}" type="slidenum">
+              <a:rPr lang="en-US" sz="1350">
+                <a:solidFill>
+                  <a:srgbClr val="FFFFFF"/>
+                </a:solidFill>
+                <a:latin typeface="Trebuchet MS"/>
+              </a:rPr>
+              <a:pPr algn="l" defTabSz="685800">
+                <a:defRPr/>
+              </a:pPr>
+              <a:t>25</a:t>
+            </a:fld>
+            <a:endParaRPr lang="en-US" sz="1350" dirty="0">
+              <a:solidFill>
+                <a:srgbClr val="FFFFFF"/>
+              </a:solidFill>
+              <a:latin typeface="Trebuchet MS"/>
+            </a:endParaRPr>
+          </a:p>
+        </p:txBody>
+      </p:sp>
+      <p:pic>
+        <p:nvPicPr>
+          <p:cNvPr id="6" name="Picture 5" descr="\documentclass{article}&#10;\usepackage[a4paper, total={6in, 8in}]{geometry}&#10;\usepackage{amsmath}&#10;\usepackage{amssymb}&#10;\usepackage{xcolor}&#10;\usepackage{graphicx}&#10;&#10;\pagestyle{empty}&#10;\begin{document}&#10;&#10;&#10;\underline{cPINNs}: Interface conditions in the `` $q^{\text {th }}&quot;$ subdomain. \newline&#10;&#10;$\mathrm{MSE}_{\text {flux }}=\sum_{\forall q^{+}}\left(\frac{1}{N_{l_{q}}} \sum_{i=1}^{N_{l q}}\left|f_{q}\left(u\left(\mathbf{x}_{l_{q}}^{(i)}\right)\right) \cdot \mathbf{n}-f_{q^{+}}\left(u\left(\mathbf{x}_{l_{q}}^{(i)}\right) \cdot \mathbf{n}\right)\right|^{2}\right)$ \newline&#10;&#10;where $f$ is the flux and $q=1,2, \cdots, N_{s d}$.\newline&#10;&#10;$\operatorname{MSE}_{u_{\text {avg }}}=\sum_{\forall q^{+}}\left(\frac{1}{N_{l_{q}}} \sum_{i=1}^{N_{l_{q}}}\left|u_{\tilde{\Theta}_{q}}\left(\mathbf{x}_{l_{q}}^{(i)}\right)-\left\{\left\{u_{\tilde{\Theta}_{q}}\left(\mathbf{x}_{l_{q}}^{(i)}\right)\right\}\right\}\right|^{2}\right)$&#10;&#10;&#10;\end{document}&#10;" title="IguanaTex Bitmap Display">
+            <a:extLst>
+              <a:ext uri="{FF2B5EF4-FFF2-40B4-BE49-F238E27FC236}">
+                <a16:creationId xmlns:a16="http://schemas.microsoft.com/office/drawing/2014/main" id="{8EE60A91-78A6-465A-87AB-9B984E42B8E0}"/>
+              </a:ext>
+            </a:extLst>
+          </p:cNvPr>
+          <p:cNvPicPr>
+            <a:picLocks noChangeAspect="1"/>
+          </p:cNvPicPr>
+          <p:nvPr>
+            <p:custDataLst>
+              <p:tags r:id="rId1"/>
+            </p:custDataLst>
+          </p:nvPr>
+        </p:nvPicPr>
+        <p:blipFill>
+          <a:blip r:embed="rId4" cstate="print">
+            <a:extLst>
+              <a:ext uri="{28A0092B-C50C-407E-A947-70E740481C1C}">
+                <a14:useLocalDpi xmlns:a14="http://schemas.microsoft.com/office/drawing/2010/main" val="0"/>
+              </a:ext>
+            </a:extLst>
+          </a:blip>
+          <a:stretch>
+            <a:fillRect/>
+          </a:stretch>
+        </p:blipFill>
+        <p:spPr>
+          <a:xfrm>
+            <a:off x="389812" y="1587858"/>
+            <a:ext cx="5798858" cy="1841143"/>
+          </a:xfrm>
+          <a:prstGeom prst="rect">
+            <a:avLst/>
+          </a:prstGeom>
+        </p:spPr>
+      </p:pic>
+      <p:pic>
+        <p:nvPicPr>
+          <p:cNvPr id="13" name="Picture 12" descr="Diagram&#10;&#10;Description automatically generated with medium confidence">
+            <a:extLst>
+              <a:ext uri="{FF2B5EF4-FFF2-40B4-BE49-F238E27FC236}">
+                <a16:creationId xmlns:a16="http://schemas.microsoft.com/office/drawing/2014/main" id="{97FE3518-E043-4A69-88FE-B02B984D2C4D}"/>
+              </a:ext>
+            </a:extLst>
+          </p:cNvPr>
+          <p:cNvPicPr>
+            <a:picLocks noChangeAspect="1"/>
+          </p:cNvPicPr>
+          <p:nvPr/>
+        </p:nvPicPr>
+        <p:blipFill>
+          <a:blip r:embed="rId5">
+            <a:extLst>
+              <a:ext uri="{28A0092B-C50C-407E-A947-70E740481C1C}">
+                <a14:useLocalDpi xmlns:a14="http://schemas.microsoft.com/office/drawing/2010/main" val="0"/>
+              </a:ext>
+            </a:extLst>
+          </a:blip>
+          <a:stretch>
+            <a:fillRect/>
+          </a:stretch>
+        </p:blipFill>
+        <p:spPr>
+          <a:xfrm>
+            <a:off x="1397581" y="3570061"/>
+            <a:ext cx="2014819" cy="1814766"/>
+          </a:xfrm>
+          <a:prstGeom prst="rect">
+            <a:avLst/>
+          </a:prstGeom>
+        </p:spPr>
+      </p:pic>
+      <p:pic>
+        <p:nvPicPr>
+          <p:cNvPr id="15" name="Picture 14" descr="Diagram&#10;&#10;Description automatically generated">
+            <a:extLst>
+              <a:ext uri="{FF2B5EF4-FFF2-40B4-BE49-F238E27FC236}">
+                <a16:creationId xmlns:a16="http://schemas.microsoft.com/office/drawing/2014/main" id="{76C0A240-DF28-4FAB-944F-8202E46E45DF}"/>
+              </a:ext>
+            </a:extLst>
+          </p:cNvPr>
+          <p:cNvPicPr>
+            <a:picLocks noChangeAspect="1"/>
+          </p:cNvPicPr>
+          <p:nvPr/>
+        </p:nvPicPr>
+        <p:blipFill>
+          <a:blip r:embed="rId6">
+            <a:extLst>
+              <a:ext uri="{28A0092B-C50C-407E-A947-70E740481C1C}">
+                <a14:useLocalDpi xmlns:a14="http://schemas.microsoft.com/office/drawing/2010/main" val="0"/>
+              </a:ext>
+            </a:extLst>
+          </a:blip>
+          <a:stretch>
+            <a:fillRect/>
+          </a:stretch>
+        </p:blipFill>
+        <p:spPr>
+          <a:xfrm>
+            <a:off x="4318150" y="3555772"/>
+            <a:ext cx="2029109" cy="1829055"/>
+          </a:xfrm>
+          <a:prstGeom prst="rect">
+            <a:avLst/>
+          </a:prstGeom>
+        </p:spPr>
+      </p:pic>
+      <p:sp>
+        <p:nvSpPr>
+          <p:cNvPr id="23" name="Rectangle 22">
+            <a:extLst>
+              <a:ext uri="{FF2B5EF4-FFF2-40B4-BE49-F238E27FC236}">
+                <a16:creationId xmlns:a16="http://schemas.microsoft.com/office/drawing/2014/main" id="{8B970936-F334-4FA9-8B2B-68CB9A73A1B0}"/>
+              </a:ext>
+            </a:extLst>
+          </p:cNvPr>
+          <p:cNvSpPr/>
+          <p:nvPr/>
+        </p:nvSpPr>
+        <p:spPr>
+          <a:xfrm>
+            <a:off x="325114" y="1957443"/>
+            <a:ext cx="5937663" cy="562550"/>
+          </a:xfrm>
+          <a:prstGeom prst="rect">
+            <a:avLst/>
+          </a:prstGeom>
+          <a:noFill/>
+          <a:ln>
+            <a:solidFill>
+              <a:srgbClr val="FF0000"/>
+            </a:solidFill>
+          </a:ln>
+        </p:spPr>
+        <p:style>
+          <a:lnRef idx="2">
+            <a:schemeClr val="accent3"/>
+          </a:lnRef>
+          <a:fillRef idx="1">
+            <a:schemeClr val="lt1"/>
+          </a:fillRef>
+          <a:effectRef idx="0">
+            <a:schemeClr val="accent3"/>
+          </a:effectRef>
+          <a:fontRef idx="minor">
+            <a:schemeClr val="dk1"/>
+          </a:fontRef>
+        </p:style>
+        <p:txBody>
+          <a:bodyPr rtlCol="0" anchor="ctr"/>
+          <a:lstStyle/>
+          <a:p>
+            <a:pPr algn="ctr" defTabSz="685800">
+              <a:defRPr/>
+            </a:pPr>
+            <a:endParaRPr lang="en-IN" sz="1350">
+              <a:solidFill>
+                <a:srgbClr val="CDCDCD"/>
+              </a:solidFill>
+              <a:latin typeface="Trebuchet MS"/>
+            </a:endParaRPr>
+          </a:p>
+        </p:txBody>
+      </p:sp>
+      <p:sp>
+        <p:nvSpPr>
+          <p:cNvPr id="24" name="Rectangle 23">
+            <a:extLst>
+              <a:ext uri="{FF2B5EF4-FFF2-40B4-BE49-F238E27FC236}">
+                <a16:creationId xmlns:a16="http://schemas.microsoft.com/office/drawing/2014/main" id="{A23D4CDF-39FA-4266-ABFC-9093610F0FC7}"/>
+              </a:ext>
+            </a:extLst>
+          </p:cNvPr>
+          <p:cNvSpPr/>
+          <p:nvPr/>
+        </p:nvSpPr>
+        <p:spPr>
+          <a:xfrm>
+            <a:off x="325114" y="2936980"/>
+            <a:ext cx="5937663" cy="562550"/>
+          </a:xfrm>
+          <a:prstGeom prst="rect">
+            <a:avLst/>
+          </a:prstGeom>
+          <a:noFill/>
+          <a:ln>
+            <a:solidFill>
+              <a:srgbClr val="FF0000"/>
+            </a:solidFill>
+          </a:ln>
+        </p:spPr>
+        <p:style>
+          <a:lnRef idx="2">
+            <a:schemeClr val="accent3"/>
+          </a:lnRef>
+          <a:fillRef idx="1">
+            <a:schemeClr val="lt1"/>
+          </a:fillRef>
+          <a:effectRef idx="0">
+            <a:schemeClr val="accent3"/>
+          </a:effectRef>
+          <a:fontRef idx="minor">
+            <a:schemeClr val="dk1"/>
+          </a:fontRef>
+        </p:style>
+        <p:txBody>
+          <a:bodyPr rtlCol="0" anchor="ctr"/>
+          <a:lstStyle/>
+          <a:p>
+            <a:pPr algn="ctr" defTabSz="685800">
+              <a:defRPr/>
+            </a:pPr>
+            <a:endParaRPr lang="en-IN" sz="1350">
+              <a:solidFill>
+                <a:srgbClr val="CDCDCD"/>
+              </a:solidFill>
+              <a:latin typeface="Trebuchet MS"/>
+            </a:endParaRPr>
+          </a:p>
+        </p:txBody>
+      </p:sp>
+      <p:sp>
+        <p:nvSpPr>
+          <p:cNvPr id="14" name="TextBox 13">
+            <a:extLst>
+              <a:ext uri="{FF2B5EF4-FFF2-40B4-BE49-F238E27FC236}">
+                <a16:creationId xmlns:a16="http://schemas.microsoft.com/office/drawing/2014/main" id="{A8F72667-FE26-488C-A472-3C46D9E47C0E}"/>
+              </a:ext>
+            </a:extLst>
+          </p:cNvPr>
+          <p:cNvSpPr txBox="1"/>
+          <p:nvPr/>
+        </p:nvSpPr>
+        <p:spPr>
+          <a:xfrm>
+            <a:off x="496262" y="5312849"/>
+            <a:ext cx="7362126" cy="507831"/>
+          </a:xfrm>
+          <a:prstGeom prst="rect">
+            <a:avLst/>
+          </a:prstGeom>
+          <a:noFill/>
+          <a:ln w="6350" cap="flat" cmpd="sng" algn="ctr">
+            <a:noFill/>
+            <a:prstDash val="solid"/>
+          </a:ln>
+          <a:effectLst/>
+        </p:spPr>
+        <p:style>
+          <a:lnRef idx="2">
+            <a:schemeClr val="accent1">
+              <a:shade val="50000"/>
+            </a:schemeClr>
+          </a:lnRef>
+          <a:fillRef idx="1">
+            <a:schemeClr val="accent1"/>
+          </a:fillRef>
+          <a:effectRef idx="0">
+            <a:schemeClr val="accent1"/>
+          </a:effectRef>
+          <a:fontRef idx="minor">
+            <a:schemeClr val="lt1"/>
+          </a:fontRef>
+        </p:style>
+        <p:txBody>
+          <a:bodyPr wrap="square">
+            <a:spAutoFit/>
+          </a:bodyPr>
+          <a:lstStyle/>
+          <a:p>
+            <a:pPr marL="214313" indent="-214313" defTabSz="685800">
+              <a:buFont typeface="Wingdings" panose="05000000000000000000" pitchFamily="2" charset="2"/>
+              <a:buChar char="§"/>
+              <a:defRPr/>
+            </a:pPr>
+            <a:endParaRPr lang="en-US" sz="900" dirty="0">
+              <a:solidFill>
+                <a:srgbClr val="0070C0"/>
+              </a:solidFill>
+              <a:latin typeface="Arial" panose="020B0604020202020204" pitchFamily="34" charset="0"/>
+              <a:cs typeface="Arial" panose="020B0604020202020204" pitchFamily="34" charset="0"/>
+            </a:endParaRPr>
+          </a:p>
+          <a:p>
+            <a:pPr marL="214313" indent="-214313" defTabSz="685800">
+              <a:buFont typeface="Wingdings" panose="05000000000000000000" pitchFamily="2" charset="2"/>
+              <a:buChar char="§"/>
+              <a:defRPr/>
+            </a:pPr>
+            <a:r>
+              <a:rPr lang="en-US" sz="900" dirty="0">
+                <a:solidFill>
+                  <a:srgbClr val="0070C0"/>
+                </a:solidFill>
+                <a:latin typeface="Arial" panose="020B0604020202020204" pitchFamily="34" charset="0"/>
+                <a:cs typeface="Arial" panose="020B0604020202020204" pitchFamily="34" charset="0"/>
+              </a:rPr>
+              <a:t>Jagtap AD, </a:t>
+            </a:r>
+            <a:r>
+              <a:rPr lang="en-US" sz="900" dirty="0" err="1">
+                <a:solidFill>
+                  <a:srgbClr val="0070C0"/>
+                </a:solidFill>
+                <a:latin typeface="Arial" panose="020B0604020202020204" pitchFamily="34" charset="0"/>
+                <a:cs typeface="Arial" panose="020B0604020202020204" pitchFamily="34" charset="0"/>
+              </a:rPr>
+              <a:t>Kharazmi</a:t>
+            </a:r>
+            <a:r>
+              <a:rPr lang="en-US" sz="900" dirty="0">
+                <a:solidFill>
+                  <a:srgbClr val="0070C0"/>
+                </a:solidFill>
+                <a:latin typeface="Arial" panose="020B0604020202020204" pitchFamily="34" charset="0"/>
+                <a:cs typeface="Arial" panose="020B0604020202020204" pitchFamily="34" charset="0"/>
+              </a:rPr>
+              <a:t> E, Karniadakis GE. Conservative physics-informed neural networks on discrete domains for conservation laws: Applications to forward and inverse problems. Computer Methods in Applied Mechanics and Engineering. 2020 Jun 15;365:113028</a:t>
+            </a:r>
+            <a:endParaRPr lang="en-US" sz="900" dirty="0">
+              <a:solidFill>
+                <a:srgbClr val="0070C0"/>
+              </a:solidFill>
+              <a:latin typeface="Trebuchet MS"/>
+            </a:endParaRPr>
+          </a:p>
+        </p:txBody>
+      </p:sp>
+      <p:sp>
+        <p:nvSpPr>
+          <p:cNvPr id="2" name="圆角矩形 7">
+            <a:extLst>
+              <a:ext uri="{FF2B5EF4-FFF2-40B4-BE49-F238E27FC236}">
+                <a16:creationId xmlns:a16="http://schemas.microsoft.com/office/drawing/2014/main" id="{103085C7-0AE6-65A5-3B60-0443D5DEEDCE}"/>
+              </a:ext>
+            </a:extLst>
+          </p:cNvPr>
+          <p:cNvSpPr/>
+          <p:nvPr/>
+        </p:nvSpPr>
+        <p:spPr>
+          <a:xfrm>
+            <a:off x="0" y="0"/>
+            <a:ext cx="9144000" cy="756138"/>
+          </a:xfrm>
+          <a:prstGeom prst="roundRect">
+            <a:avLst/>
+          </a:prstGeom>
+          <a:solidFill>
+            <a:schemeClr val="bg2"/>
+          </a:solidFill>
+          <a:ln>
+            <a:solidFill>
+              <a:schemeClr val="tx1">
+                <a:lumMod val="50000"/>
+                <a:lumOff val="50000"/>
+              </a:schemeClr>
+            </a:solidFill>
+          </a:ln>
+        </p:spPr>
+        <p:style>
+          <a:lnRef idx="2">
+            <a:schemeClr val="accent1">
+              <a:shade val="50000"/>
+            </a:schemeClr>
+          </a:lnRef>
+          <a:fillRef idx="1">
+            <a:schemeClr val="accent1"/>
+          </a:fillRef>
+          <a:effectRef idx="0">
+            <a:schemeClr val="accent1"/>
+          </a:effectRef>
+          <a:fontRef idx="minor">
+            <a:schemeClr val="lt1"/>
+          </a:fontRef>
+        </p:style>
+        <p:txBody>
+          <a:bodyPr rtlCol="0" anchor="ctr"/>
+          <a:lstStyle/>
+          <a:p>
+            <a:pPr defTabSz="685800">
+              <a:lnSpc>
+                <a:spcPct val="90000"/>
+              </a:lnSpc>
+              <a:defRPr/>
+            </a:pPr>
+            <a:r>
+              <a:rPr lang="en-IN" altLang="zh-CN" sz="3200" b="1" dirty="0">
+                <a:solidFill>
+                  <a:srgbClr val="C00000"/>
+                </a:solidFill>
+                <a:latin typeface="Arial" panose="020B0604020202020204" pitchFamily="34" charset="0"/>
+                <a:cs typeface="Arial" panose="020B0604020202020204" pitchFamily="34" charset="0"/>
+              </a:rPr>
+              <a:t>Conservative PINNs (</a:t>
+            </a:r>
+            <a:r>
+              <a:rPr lang="en-IN" altLang="zh-CN" sz="3200" b="1" dirty="0" err="1">
+                <a:solidFill>
+                  <a:srgbClr val="C00000"/>
+                </a:solidFill>
+                <a:latin typeface="Arial" panose="020B0604020202020204" pitchFamily="34" charset="0"/>
+                <a:cs typeface="Arial" panose="020B0604020202020204" pitchFamily="34" charset="0"/>
+              </a:rPr>
+              <a:t>cPINNs</a:t>
+            </a:r>
+            <a:r>
+              <a:rPr lang="en-IN" altLang="zh-CN" sz="3200" b="1" dirty="0">
+                <a:solidFill>
+                  <a:srgbClr val="C00000"/>
+                </a:solidFill>
+                <a:latin typeface="Arial" panose="020B0604020202020204" pitchFamily="34" charset="0"/>
+                <a:cs typeface="Arial" panose="020B0604020202020204" pitchFamily="34" charset="0"/>
+              </a:rPr>
+              <a:t>)</a:t>
+            </a:r>
+            <a:endParaRPr lang="en-IN" altLang="zh-CN" sz="2400" b="1" dirty="0">
+              <a:solidFill>
+                <a:srgbClr val="C00000"/>
+              </a:solidFill>
+              <a:latin typeface="Arial" panose="020B0604020202020204" pitchFamily="34" charset="0"/>
+              <a:cs typeface="Arial" panose="020B0604020202020204" pitchFamily="34" charset="0"/>
+            </a:endParaRPr>
+          </a:p>
+        </p:txBody>
+      </p:sp>
+    </p:spTree>
+    <p:extLst>
+      <p:ext uri="{BB962C8B-B14F-4D97-AF65-F5344CB8AC3E}">
+        <p14:creationId xmlns:p14="http://schemas.microsoft.com/office/powerpoint/2010/main" val="1411377431"/>
+      </p:ext>
+    </p:extLst>
+  </p:cSld>
+  <p:clrMapOvr>
+    <a:masterClrMapping/>
+  </p:clrMapOvr>
+</p:sld>
+</file>
+
+<file path=ppt/slides/slide26.xml><?xml version="1.0" encoding="utf-8"?>
+<p:sld xmlns:a="http://schemas.openxmlformats.org/drawingml/2006/main" xmlns:r="http://schemas.openxmlformats.org/officeDocument/2006/relationships" xmlns:p="http://schemas.openxmlformats.org/presentationml/2006/main">
+  <p:cSld>
+    <p:spTree>
+      <p:nvGrpSpPr>
+        <p:cNvPr id="1" name=""/>
+        <p:cNvGrpSpPr/>
+        <p:nvPr/>
+      </p:nvGrpSpPr>
+      <p:grpSpPr>
+        <a:xfrm>
+          <a:off x="0" y="0"/>
+          <a:ext cx="0" cy="0"/>
+          <a:chOff x="0" y="0"/>
+          <a:chExt cx="0" cy="0"/>
+        </a:xfrm>
+      </p:grpSpPr>
+      <p:sp>
+        <p:nvSpPr>
+          <p:cNvPr id="3" name="Slide Number Placeholder 2">
+            <a:extLst>
+              <a:ext uri="{FF2B5EF4-FFF2-40B4-BE49-F238E27FC236}">
+                <a16:creationId xmlns:a16="http://schemas.microsoft.com/office/drawing/2014/main" id="{3D414C2D-8A45-4ABD-8CDC-4E1AB5D68212}"/>
+              </a:ext>
+            </a:extLst>
+          </p:cNvPr>
+          <p:cNvSpPr>
+            <a:spLocks noGrp="1"/>
+          </p:cNvSpPr>
+          <p:nvPr>
+            <p:ph type="sldNum" sz="quarter" idx="12"/>
+          </p:nvPr>
+        </p:nvSpPr>
+        <p:spPr/>
+        <p:txBody>
+          <a:bodyPr/>
+          <a:lstStyle/>
+          <a:p>
+            <a:pPr algn="l" defTabSz="685800">
+              <a:defRPr/>
+            </a:pPr>
+            <a:fld id="{5DEF7F31-0B8A-474A-B86C-91F381754329}" type="slidenum">
+              <a:rPr lang="en-US" sz="1350">
+                <a:solidFill>
+                  <a:srgbClr val="FFFFFF"/>
+                </a:solidFill>
+                <a:latin typeface="Trebuchet MS"/>
+              </a:rPr>
+              <a:pPr algn="l" defTabSz="685800">
+                <a:defRPr/>
+              </a:pPr>
+              <a:t>26</a:t>
+            </a:fld>
+            <a:endParaRPr lang="en-US" sz="1350" dirty="0">
+              <a:solidFill>
+                <a:srgbClr val="FFFFFF"/>
+              </a:solidFill>
+              <a:latin typeface="Trebuchet MS"/>
+            </a:endParaRPr>
+          </a:p>
+        </p:txBody>
+      </p:sp>
+      <p:sp>
+        <p:nvSpPr>
+          <p:cNvPr id="2" name="圆角矩形 7">
+            <a:extLst>
+              <a:ext uri="{FF2B5EF4-FFF2-40B4-BE49-F238E27FC236}">
+                <a16:creationId xmlns:a16="http://schemas.microsoft.com/office/drawing/2014/main" id="{5B7F6C37-B15C-02AA-C4BA-A6533F3F8CA8}"/>
+              </a:ext>
+            </a:extLst>
+          </p:cNvPr>
+          <p:cNvSpPr/>
+          <p:nvPr/>
+        </p:nvSpPr>
+        <p:spPr>
+          <a:xfrm>
+            <a:off x="0" y="0"/>
+            <a:ext cx="9144000" cy="756138"/>
+          </a:xfrm>
+          <a:prstGeom prst="roundRect">
+            <a:avLst/>
+          </a:prstGeom>
+          <a:solidFill>
+            <a:schemeClr val="bg2"/>
+          </a:solidFill>
+          <a:ln>
+            <a:solidFill>
+              <a:schemeClr val="tx1">
+                <a:lumMod val="50000"/>
+                <a:lumOff val="50000"/>
+              </a:schemeClr>
+            </a:solidFill>
+          </a:ln>
+        </p:spPr>
+        <p:style>
+          <a:lnRef idx="2">
+            <a:schemeClr val="accent1">
+              <a:shade val="50000"/>
+            </a:schemeClr>
+          </a:lnRef>
+          <a:fillRef idx="1">
+            <a:schemeClr val="accent1"/>
+          </a:fillRef>
+          <a:effectRef idx="0">
+            <a:schemeClr val="accent1"/>
+          </a:effectRef>
+          <a:fontRef idx="minor">
+            <a:schemeClr val="lt1"/>
+          </a:fontRef>
+        </p:style>
+        <p:txBody>
+          <a:bodyPr rtlCol="0" anchor="ctr"/>
+          <a:lstStyle/>
+          <a:p>
+            <a:pPr defTabSz="685800">
+              <a:lnSpc>
+                <a:spcPct val="90000"/>
+              </a:lnSpc>
+              <a:defRPr/>
+            </a:pPr>
+            <a:r>
+              <a:rPr lang="en-IN" altLang="zh-CN" sz="2400" b="1" dirty="0">
+                <a:solidFill>
+                  <a:srgbClr val="C00000"/>
+                </a:solidFill>
+                <a:latin typeface="Arial" panose="020B0604020202020204" pitchFamily="34" charset="0"/>
+                <a:cs typeface="Arial" panose="020B0604020202020204" pitchFamily="34" charset="0"/>
+              </a:rPr>
+              <a:t>Overlapping Domain Decomposition</a:t>
+            </a:r>
+          </a:p>
+        </p:txBody>
+      </p:sp>
+      <p:pic>
+        <p:nvPicPr>
+          <p:cNvPr id="7" name="图片 6" descr="图示, 维恩图&#10;&#10;描述已自动生成">
+            <a:extLst>
+              <a:ext uri="{FF2B5EF4-FFF2-40B4-BE49-F238E27FC236}">
+                <a16:creationId xmlns:a16="http://schemas.microsoft.com/office/drawing/2014/main" id="{F5B30ACE-D725-FE41-67F4-5559B9882125}"/>
+              </a:ext>
+            </a:extLst>
+          </p:cNvPr>
+          <p:cNvPicPr>
+            <a:picLocks noChangeAspect="1"/>
+          </p:cNvPicPr>
+          <p:nvPr/>
+        </p:nvPicPr>
+        <p:blipFill>
+          <a:blip r:embed="rId3">
+            <a:extLst>
+              <a:ext uri="{28A0092B-C50C-407E-A947-70E740481C1C}">
+                <a14:useLocalDpi xmlns:a14="http://schemas.microsoft.com/office/drawing/2010/main" val="0"/>
+              </a:ext>
+            </a:extLst>
+          </a:blip>
+          <a:stretch>
+            <a:fillRect/>
+          </a:stretch>
+        </p:blipFill>
+        <p:spPr>
+          <a:xfrm>
+            <a:off x="1988585" y="1197602"/>
+            <a:ext cx="5019048" cy="3114286"/>
+          </a:xfrm>
+          <a:prstGeom prst="rect">
+            <a:avLst/>
+          </a:prstGeom>
+        </p:spPr>
+      </p:pic>
+      <p:pic>
+        <p:nvPicPr>
+          <p:cNvPr id="9" name="图片 8" descr="文本&#10;&#10;描述已自动生成">
+            <a:extLst>
+              <a:ext uri="{FF2B5EF4-FFF2-40B4-BE49-F238E27FC236}">
+                <a16:creationId xmlns:a16="http://schemas.microsoft.com/office/drawing/2014/main" id="{08BED31C-D48B-F935-084F-ECFFF55CB3CF}"/>
+              </a:ext>
+            </a:extLst>
+          </p:cNvPr>
+          <p:cNvPicPr>
+            <a:picLocks noChangeAspect="1"/>
+          </p:cNvPicPr>
+          <p:nvPr/>
+        </p:nvPicPr>
+        <p:blipFill>
+          <a:blip r:embed="rId4">
+            <a:extLst>
+              <a:ext uri="{28A0092B-C50C-407E-A947-70E740481C1C}">
+                <a14:useLocalDpi xmlns:a14="http://schemas.microsoft.com/office/drawing/2010/main" val="0"/>
+              </a:ext>
+            </a:extLst>
+          </a:blip>
+          <a:stretch>
+            <a:fillRect/>
+          </a:stretch>
+        </p:blipFill>
+        <p:spPr>
+          <a:xfrm>
+            <a:off x="534963" y="4606784"/>
+            <a:ext cx="3398688" cy="1324489"/>
+          </a:xfrm>
+          <a:prstGeom prst="rect">
+            <a:avLst/>
+          </a:prstGeom>
+        </p:spPr>
+      </p:pic>
+      <p:pic>
+        <p:nvPicPr>
+          <p:cNvPr id="12" name="图片 11" descr="文本&#10;&#10;描述已自动生成">
+            <a:extLst>
+              <a:ext uri="{FF2B5EF4-FFF2-40B4-BE49-F238E27FC236}">
+                <a16:creationId xmlns:a16="http://schemas.microsoft.com/office/drawing/2014/main" id="{3F6218D0-55DD-0EE9-C453-69517C6159A3}"/>
+              </a:ext>
+            </a:extLst>
+          </p:cNvPr>
+          <p:cNvPicPr>
+            <a:picLocks noChangeAspect="1"/>
+          </p:cNvPicPr>
+          <p:nvPr/>
+        </p:nvPicPr>
+        <p:blipFill>
+          <a:blip r:embed="rId5">
+            <a:extLst>
+              <a:ext uri="{28A0092B-C50C-407E-A947-70E740481C1C}">
+                <a14:useLocalDpi xmlns:a14="http://schemas.microsoft.com/office/drawing/2010/main" val="0"/>
+              </a:ext>
+            </a:extLst>
+          </a:blip>
+          <a:stretch>
+            <a:fillRect/>
+          </a:stretch>
+        </p:blipFill>
+        <p:spPr>
+          <a:xfrm>
+            <a:off x="5210350" y="4606784"/>
+            <a:ext cx="3344669" cy="1324489"/>
+          </a:xfrm>
+          <a:prstGeom prst="rect">
+            <a:avLst/>
+          </a:prstGeom>
+        </p:spPr>
+      </p:pic>
+      <p:sp>
+        <p:nvSpPr>
+          <p:cNvPr id="13" name="箭头: 左右 12">
+            <a:extLst>
+              <a:ext uri="{FF2B5EF4-FFF2-40B4-BE49-F238E27FC236}">
+                <a16:creationId xmlns:a16="http://schemas.microsoft.com/office/drawing/2014/main" id="{21BB5478-121C-F5A0-C5A0-A6A6BF4880FE}"/>
+              </a:ext>
+            </a:extLst>
+          </p:cNvPr>
+          <p:cNvSpPr/>
+          <p:nvPr/>
+        </p:nvSpPr>
+        <p:spPr>
+          <a:xfrm>
+            <a:off x="3987669" y="5043055"/>
+            <a:ext cx="1277058" cy="617343"/>
+          </a:xfrm>
+          <a:prstGeom prst="leftRightArrow">
+            <a:avLst/>
+          </a:prstGeom>
+        </p:spPr>
+        <p:style>
+          <a:lnRef idx="2">
+            <a:schemeClr val="accent1">
+              <a:shade val="15000"/>
+            </a:schemeClr>
+          </a:lnRef>
+          <a:fillRef idx="1">
+            <a:schemeClr val="accent1"/>
+          </a:fillRef>
+          <a:effectRef idx="0">
+            <a:schemeClr val="accent1"/>
+          </a:effectRef>
+          <a:fontRef idx="minor">
+            <a:schemeClr val="lt1"/>
+          </a:fontRef>
+        </p:style>
+        <p:txBody>
+          <a:bodyPr rtlCol="0" anchor="ctr"/>
+          <a:lstStyle/>
+          <a:p>
+            <a:pPr algn="ctr"/>
+            <a:endParaRPr lang="zh-CN" altLang="en-US"/>
+          </a:p>
+        </p:txBody>
+      </p:sp>
+      <p:sp>
+        <p:nvSpPr>
+          <p:cNvPr id="16" name="文本框 15">
+            <a:extLst>
+              <a:ext uri="{FF2B5EF4-FFF2-40B4-BE49-F238E27FC236}">
+                <a16:creationId xmlns:a16="http://schemas.microsoft.com/office/drawing/2014/main" id="{AB805CF5-9276-FD89-4263-C138BABABFB9}"/>
+              </a:ext>
+            </a:extLst>
+          </p:cNvPr>
+          <p:cNvSpPr txBox="1"/>
+          <p:nvPr/>
+        </p:nvSpPr>
+        <p:spPr>
+          <a:xfrm>
+            <a:off x="5787306" y="6538913"/>
+            <a:ext cx="3398688" cy="276999"/>
+          </a:xfrm>
+          <a:prstGeom prst="rect">
+            <a:avLst/>
+          </a:prstGeom>
+          <a:noFill/>
+        </p:spPr>
+        <p:txBody>
+          <a:bodyPr wrap="square" rtlCol="0">
+            <a:spAutoFit/>
+          </a:bodyPr>
+          <a:lstStyle/>
+          <a:p>
+            <a:r>
+              <a:rPr lang="en-US" altLang="zh-CN" sz="1200" i="1" dirty="0">
+                <a:latin typeface="Times New Roman" panose="02020603050405020304" pitchFamily="18" charset="0"/>
+                <a:cs typeface="Times New Roman" panose="02020603050405020304" pitchFamily="18" charset="0"/>
+              </a:rPr>
+              <a:t>Cai, Overlapping Domain Decomposition Method</a:t>
+            </a:r>
+            <a:endParaRPr lang="zh-CN" altLang="en-US" sz="1200" i="1" dirty="0">
+              <a:latin typeface="Times New Roman" panose="02020603050405020304" pitchFamily="18" charset="0"/>
+              <a:cs typeface="Times New Roman" panose="02020603050405020304" pitchFamily="18" charset="0"/>
+            </a:endParaRPr>
+          </a:p>
+        </p:txBody>
+      </p:sp>
+    </p:spTree>
+    <p:extLst>
+      <p:ext uri="{BB962C8B-B14F-4D97-AF65-F5344CB8AC3E}">
+        <p14:creationId xmlns:p14="http://schemas.microsoft.com/office/powerpoint/2010/main" val="3627656221"/>
+      </p:ext>
+    </p:extLst>
+  </p:cSld>
+  <p:clrMapOvr>
+    <a:masterClrMapping/>
+  </p:clrMapOvr>
+</p:sld>
+</file>
+
+<file path=ppt/slides/slide27.xml><?xml version="1.0" encoding="utf-8"?>
+<p:sld xmlns:a="http://schemas.openxmlformats.org/drawingml/2006/main" xmlns:r="http://schemas.openxmlformats.org/officeDocument/2006/relationships" xmlns:p="http://schemas.openxmlformats.org/presentationml/2006/main">
+  <p:cSld>
+    <p:spTree>
+      <p:nvGrpSpPr>
+        <p:cNvPr id="1" name=""/>
+        <p:cNvGrpSpPr/>
+        <p:nvPr/>
+      </p:nvGrpSpPr>
+      <p:grpSpPr>
+        <a:xfrm>
+          <a:off x="0" y="0"/>
+          <a:ext cx="0" cy="0"/>
+          <a:chOff x="0" y="0"/>
+          <a:chExt cx="0" cy="0"/>
+        </a:xfrm>
+      </p:grpSpPr>
+      <p:sp>
+        <p:nvSpPr>
+          <p:cNvPr id="3" name="Slide Number Placeholder 2">
+            <a:extLst>
+              <a:ext uri="{FF2B5EF4-FFF2-40B4-BE49-F238E27FC236}">
+                <a16:creationId xmlns:a16="http://schemas.microsoft.com/office/drawing/2014/main" id="{3D414C2D-8A45-4ABD-8CDC-4E1AB5D68212}"/>
+              </a:ext>
+            </a:extLst>
+          </p:cNvPr>
+          <p:cNvSpPr>
+            <a:spLocks noGrp="1"/>
+          </p:cNvSpPr>
+          <p:nvPr>
+            <p:ph type="sldNum" sz="quarter" idx="12"/>
+          </p:nvPr>
+        </p:nvSpPr>
+        <p:spPr/>
+        <p:txBody>
+          <a:bodyPr/>
+          <a:lstStyle/>
+          <a:p>
+            <a:pPr algn="l" defTabSz="685800">
+              <a:defRPr/>
+            </a:pPr>
+            <a:fld id="{5DEF7F31-0B8A-474A-B86C-91F381754329}" type="slidenum">
+              <a:rPr lang="en-US" sz="1350">
+                <a:solidFill>
+                  <a:srgbClr val="FFFFFF"/>
+                </a:solidFill>
+                <a:latin typeface="Trebuchet MS"/>
+              </a:rPr>
+              <a:pPr algn="l" defTabSz="685800">
+                <a:defRPr/>
+              </a:pPr>
+              <a:t>27</a:t>
+            </a:fld>
+            <a:endParaRPr lang="en-US" sz="1350" dirty="0">
+              <a:solidFill>
+                <a:srgbClr val="FFFFFF"/>
+              </a:solidFill>
+              <a:latin typeface="Trebuchet MS"/>
+            </a:endParaRPr>
+          </a:p>
+        </p:txBody>
+      </p:sp>
+      <p:sp>
+        <p:nvSpPr>
+          <p:cNvPr id="2" name="圆角矩形 7">
+            <a:extLst>
+              <a:ext uri="{FF2B5EF4-FFF2-40B4-BE49-F238E27FC236}">
+                <a16:creationId xmlns:a16="http://schemas.microsoft.com/office/drawing/2014/main" id="{5B7F6C37-B15C-02AA-C4BA-A6533F3F8CA8}"/>
+              </a:ext>
+            </a:extLst>
+          </p:cNvPr>
+          <p:cNvSpPr/>
+          <p:nvPr/>
+        </p:nvSpPr>
+        <p:spPr>
+          <a:xfrm>
+            <a:off x="0" y="0"/>
+            <a:ext cx="9144000" cy="756138"/>
+          </a:xfrm>
+          <a:prstGeom prst="roundRect">
+            <a:avLst/>
+          </a:prstGeom>
+          <a:solidFill>
+            <a:schemeClr val="bg2"/>
+          </a:solidFill>
+          <a:ln>
+            <a:solidFill>
+              <a:schemeClr val="tx1">
+                <a:lumMod val="50000"/>
+                <a:lumOff val="50000"/>
+              </a:schemeClr>
+            </a:solidFill>
+          </a:ln>
+        </p:spPr>
+        <p:style>
+          <a:lnRef idx="2">
+            <a:schemeClr val="accent1">
+              <a:shade val="50000"/>
+            </a:schemeClr>
+          </a:lnRef>
+          <a:fillRef idx="1">
+            <a:schemeClr val="accent1"/>
+          </a:fillRef>
+          <a:effectRef idx="0">
+            <a:schemeClr val="accent1"/>
+          </a:effectRef>
+          <a:fontRef idx="minor">
+            <a:schemeClr val="lt1"/>
+          </a:fontRef>
+        </p:style>
+        <p:txBody>
+          <a:bodyPr rtlCol="0" anchor="ctr"/>
+          <a:lstStyle/>
+          <a:p>
+            <a:pPr defTabSz="685800">
+              <a:lnSpc>
+                <a:spcPct val="90000"/>
+              </a:lnSpc>
+              <a:defRPr/>
+            </a:pPr>
+            <a:r>
+              <a:rPr lang="en-IN" altLang="zh-CN" sz="2400" b="1" dirty="0">
+                <a:solidFill>
+                  <a:srgbClr val="C00000"/>
+                </a:solidFill>
+                <a:latin typeface="Arial" panose="020B0604020202020204" pitchFamily="34" charset="0"/>
+                <a:cs typeface="Arial" panose="020B0604020202020204" pitchFamily="34" charset="0"/>
+              </a:rPr>
+              <a:t>Overlapping Domain Decomposition</a:t>
+            </a:r>
+          </a:p>
+        </p:txBody>
+      </p:sp>
+      <p:pic>
+        <p:nvPicPr>
+          <p:cNvPr id="7" name="图片 6" descr="图示, 维恩图&#10;&#10;描述已自动生成">
+            <a:extLst>
+              <a:ext uri="{FF2B5EF4-FFF2-40B4-BE49-F238E27FC236}">
+                <a16:creationId xmlns:a16="http://schemas.microsoft.com/office/drawing/2014/main" id="{F5B30ACE-D725-FE41-67F4-5559B9882125}"/>
+              </a:ext>
+            </a:extLst>
+          </p:cNvPr>
+          <p:cNvPicPr>
+            <a:picLocks noChangeAspect="1"/>
+          </p:cNvPicPr>
+          <p:nvPr/>
+        </p:nvPicPr>
+        <p:blipFill>
+          <a:blip r:embed="rId3">
+            <a:extLst>
+              <a:ext uri="{28A0092B-C50C-407E-A947-70E740481C1C}">
+                <a14:useLocalDpi xmlns:a14="http://schemas.microsoft.com/office/drawing/2010/main" val="0"/>
+              </a:ext>
+            </a:extLst>
+          </a:blip>
+          <a:stretch>
+            <a:fillRect/>
+          </a:stretch>
+        </p:blipFill>
+        <p:spPr>
+          <a:xfrm>
+            <a:off x="1101894" y="1069882"/>
+            <a:ext cx="3026760" cy="1878085"/>
+          </a:xfrm>
+          <a:prstGeom prst="rect">
+            <a:avLst/>
+          </a:prstGeom>
+        </p:spPr>
+      </p:pic>
+      <p:pic>
+        <p:nvPicPr>
+          <p:cNvPr id="15" name="图片 14" descr="图示&#10;&#10;描述已自动生成">
+            <a:extLst>
+              <a:ext uri="{FF2B5EF4-FFF2-40B4-BE49-F238E27FC236}">
+                <a16:creationId xmlns:a16="http://schemas.microsoft.com/office/drawing/2014/main" id="{0C620673-9685-94C2-54D6-B52CDB8A6139}"/>
+              </a:ext>
+            </a:extLst>
+          </p:cNvPr>
+          <p:cNvPicPr>
+            <a:picLocks noChangeAspect="1"/>
+          </p:cNvPicPr>
+          <p:nvPr/>
+        </p:nvPicPr>
+        <p:blipFill>
+          <a:blip r:embed="rId4">
+            <a:extLst>
+              <a:ext uri="{28A0092B-C50C-407E-A947-70E740481C1C}">
+                <a14:useLocalDpi xmlns:a14="http://schemas.microsoft.com/office/drawing/2010/main" val="0"/>
+              </a:ext>
+            </a:extLst>
+          </a:blip>
+          <a:stretch>
+            <a:fillRect/>
+          </a:stretch>
+        </p:blipFill>
+        <p:spPr>
+          <a:xfrm>
+            <a:off x="879264" y="3429000"/>
+            <a:ext cx="7790476" cy="2771429"/>
+          </a:xfrm>
+          <a:prstGeom prst="rect">
+            <a:avLst/>
+          </a:prstGeom>
+        </p:spPr>
+      </p:pic>
+      <p:pic>
+        <p:nvPicPr>
+          <p:cNvPr id="5" name="图片 4" descr="图形用户界面, 应用程序, Word&#10;&#10;描述已自动生成">
+            <a:extLst>
+              <a:ext uri="{FF2B5EF4-FFF2-40B4-BE49-F238E27FC236}">
+                <a16:creationId xmlns:a16="http://schemas.microsoft.com/office/drawing/2014/main" id="{4662F9F3-0561-43B1-5215-C0E18711A293}"/>
+              </a:ext>
+            </a:extLst>
+          </p:cNvPr>
+          <p:cNvPicPr>
+            <a:picLocks noChangeAspect="1"/>
+          </p:cNvPicPr>
+          <p:nvPr/>
+        </p:nvPicPr>
+        <p:blipFill>
+          <a:blip r:embed="rId5">
+            <a:extLst>
+              <a:ext uri="{28A0092B-C50C-407E-A947-70E740481C1C}">
+                <a14:useLocalDpi xmlns:a14="http://schemas.microsoft.com/office/drawing/2010/main" val="0"/>
+              </a:ext>
+            </a:extLst>
+          </a:blip>
+          <a:stretch>
+            <a:fillRect/>
+          </a:stretch>
+        </p:blipFill>
+        <p:spPr>
+          <a:xfrm>
+            <a:off x="5236319" y="1069882"/>
+            <a:ext cx="1582832" cy="2289294"/>
+          </a:xfrm>
+          <a:prstGeom prst="rect">
+            <a:avLst/>
+          </a:prstGeom>
+        </p:spPr>
+      </p:pic>
+      <p:sp>
+        <p:nvSpPr>
+          <p:cNvPr id="6" name="文本框 5">
+            <a:extLst>
+              <a:ext uri="{FF2B5EF4-FFF2-40B4-BE49-F238E27FC236}">
+                <a16:creationId xmlns:a16="http://schemas.microsoft.com/office/drawing/2014/main" id="{0666512D-5FF0-A738-8B0F-F2FC16F25EBB}"/>
+              </a:ext>
+            </a:extLst>
+          </p:cNvPr>
+          <p:cNvSpPr txBox="1"/>
+          <p:nvPr/>
+        </p:nvSpPr>
+        <p:spPr>
+          <a:xfrm>
+            <a:off x="8104375" y="6538913"/>
+            <a:ext cx="1130730" cy="276999"/>
+          </a:xfrm>
+          <a:prstGeom prst="rect">
+            <a:avLst/>
+          </a:prstGeom>
+          <a:noFill/>
+        </p:spPr>
+        <p:txBody>
+          <a:bodyPr wrap="square" rtlCol="0">
+            <a:spAutoFit/>
+          </a:bodyPr>
+          <a:lstStyle/>
+          <a:p>
+            <a:r>
+              <a:rPr lang="en-US" altLang="zh-CN" sz="1200" i="1" dirty="0">
+                <a:latin typeface="Times New Roman" panose="02020603050405020304" pitchFamily="18" charset="0"/>
+                <a:cs typeface="Times New Roman" panose="02020603050405020304" pitchFamily="18" charset="0"/>
+              </a:rPr>
+              <a:t>Ye, et al, 2025</a:t>
+            </a:r>
+            <a:endParaRPr lang="zh-CN" altLang="en-US" sz="1200" i="1" dirty="0">
+              <a:latin typeface="Times New Roman" panose="02020603050405020304" pitchFamily="18" charset="0"/>
+              <a:cs typeface="Times New Roman" panose="02020603050405020304" pitchFamily="18" charset="0"/>
+            </a:endParaRPr>
+          </a:p>
+        </p:txBody>
+      </p:sp>
+    </p:spTree>
+    <p:extLst>
+      <p:ext uri="{BB962C8B-B14F-4D97-AF65-F5344CB8AC3E}">
+        <p14:creationId xmlns:p14="http://schemas.microsoft.com/office/powerpoint/2010/main" val="3000502392"/>
+      </p:ext>
+    </p:extLst>
+  </p:cSld>
+  <p:clrMapOvr>
+    <a:masterClrMapping/>
+  </p:clrMapOvr>
+</p:sld>
+</file>
+
+<file path=ppt/slides/slide28.xml><?xml version="1.0" encoding="utf-8"?>
+<p:sld xmlns:a="http://schemas.openxmlformats.org/drawingml/2006/main" xmlns:r="http://schemas.openxmlformats.org/officeDocument/2006/relationships" xmlns:p="http://schemas.openxmlformats.org/presentationml/2006/main">
+  <p:cSld>
+    <p:spTree>
+      <p:nvGrpSpPr>
+        <p:cNvPr id="1" name=""/>
+        <p:cNvGrpSpPr/>
+        <p:nvPr/>
+      </p:nvGrpSpPr>
+      <p:grpSpPr>
+        <a:xfrm>
+          <a:off x="0" y="0"/>
+          <a:ext cx="0" cy="0"/>
+          <a:chOff x="0" y="0"/>
+          <a:chExt cx="0" cy="0"/>
+        </a:xfrm>
+      </p:grpSpPr>
+      <p:sp>
+        <p:nvSpPr>
+          <p:cNvPr id="3" name="Slide Number Placeholder 2">
+            <a:extLst>
+              <a:ext uri="{FF2B5EF4-FFF2-40B4-BE49-F238E27FC236}">
+                <a16:creationId xmlns:a16="http://schemas.microsoft.com/office/drawing/2014/main" id="{3D414C2D-8A45-4ABD-8CDC-4E1AB5D68212}"/>
+              </a:ext>
+            </a:extLst>
+          </p:cNvPr>
+          <p:cNvSpPr>
+            <a:spLocks noGrp="1"/>
+          </p:cNvSpPr>
+          <p:nvPr>
+            <p:ph type="sldNum" sz="quarter" idx="12"/>
+          </p:nvPr>
+        </p:nvSpPr>
+        <p:spPr/>
+        <p:txBody>
+          <a:bodyPr/>
+          <a:lstStyle/>
+          <a:p>
+            <a:pPr algn="l" defTabSz="685800">
+              <a:defRPr/>
+            </a:pPr>
+            <a:fld id="{5DEF7F31-0B8A-474A-B86C-91F381754329}" type="slidenum">
+              <a:rPr lang="en-US" sz="1350">
+                <a:solidFill>
+                  <a:srgbClr val="FFFFFF"/>
+                </a:solidFill>
+                <a:latin typeface="Trebuchet MS"/>
+              </a:rPr>
+              <a:pPr algn="l" defTabSz="685800">
+                <a:defRPr/>
+              </a:pPr>
+              <a:t>28</a:t>
+            </a:fld>
+            <a:endParaRPr lang="en-US" sz="1350" dirty="0">
+              <a:solidFill>
+                <a:srgbClr val="FFFFFF"/>
+              </a:solidFill>
+              <a:latin typeface="Trebuchet MS"/>
+            </a:endParaRPr>
+          </a:p>
+        </p:txBody>
+      </p:sp>
+      <p:sp>
+        <p:nvSpPr>
+          <p:cNvPr id="2" name="圆角矩形 7">
+            <a:extLst>
+              <a:ext uri="{FF2B5EF4-FFF2-40B4-BE49-F238E27FC236}">
+                <a16:creationId xmlns:a16="http://schemas.microsoft.com/office/drawing/2014/main" id="{5B7F6C37-B15C-02AA-C4BA-A6533F3F8CA8}"/>
+              </a:ext>
+            </a:extLst>
+          </p:cNvPr>
+          <p:cNvSpPr/>
+          <p:nvPr/>
+        </p:nvSpPr>
+        <p:spPr>
+          <a:xfrm>
+            <a:off x="0" y="0"/>
+            <a:ext cx="9144000" cy="756138"/>
+          </a:xfrm>
+          <a:prstGeom prst="roundRect">
+            <a:avLst/>
+          </a:prstGeom>
+          <a:solidFill>
+            <a:schemeClr val="bg2"/>
+          </a:solidFill>
+          <a:ln>
+            <a:solidFill>
+              <a:schemeClr val="tx1">
+                <a:lumMod val="50000"/>
+                <a:lumOff val="50000"/>
+              </a:schemeClr>
+            </a:solidFill>
+          </a:ln>
+        </p:spPr>
+        <p:style>
+          <a:lnRef idx="2">
+            <a:schemeClr val="accent1">
+              <a:shade val="50000"/>
+            </a:schemeClr>
+          </a:lnRef>
+          <a:fillRef idx="1">
+            <a:schemeClr val="accent1"/>
+          </a:fillRef>
+          <a:effectRef idx="0">
+            <a:schemeClr val="accent1"/>
+          </a:effectRef>
+          <a:fontRef idx="minor">
+            <a:schemeClr val="lt1"/>
+          </a:fontRef>
+        </p:style>
+        <p:txBody>
+          <a:bodyPr rtlCol="0" anchor="ctr"/>
+          <a:lstStyle/>
+          <a:p>
+            <a:pPr defTabSz="685800">
+              <a:lnSpc>
+                <a:spcPct val="90000"/>
+              </a:lnSpc>
+              <a:defRPr/>
+            </a:pPr>
+            <a:r>
+              <a:rPr lang="en-IN" altLang="zh-CN" sz="2400" b="1" dirty="0">
+                <a:solidFill>
+                  <a:srgbClr val="C00000"/>
+                </a:solidFill>
+                <a:latin typeface="Arial" panose="020B0604020202020204" pitchFamily="34" charset="0"/>
+                <a:cs typeface="Arial" panose="020B0604020202020204" pitchFamily="34" charset="0"/>
+              </a:rPr>
+              <a:t>Example: Forward problem</a:t>
+            </a:r>
+          </a:p>
+        </p:txBody>
+      </p:sp>
+      <p:sp>
+        <p:nvSpPr>
+          <p:cNvPr id="6" name="文本框 5">
+            <a:extLst>
+              <a:ext uri="{FF2B5EF4-FFF2-40B4-BE49-F238E27FC236}">
+                <a16:creationId xmlns:a16="http://schemas.microsoft.com/office/drawing/2014/main" id="{0666512D-5FF0-A738-8B0F-F2FC16F25EBB}"/>
+              </a:ext>
+            </a:extLst>
+          </p:cNvPr>
+          <p:cNvSpPr txBox="1"/>
+          <p:nvPr/>
+        </p:nvSpPr>
+        <p:spPr>
+          <a:xfrm>
+            <a:off x="8104375" y="6538913"/>
+            <a:ext cx="1130730" cy="276999"/>
+          </a:xfrm>
+          <a:prstGeom prst="rect">
+            <a:avLst/>
+          </a:prstGeom>
+          <a:noFill/>
+        </p:spPr>
+        <p:txBody>
+          <a:bodyPr wrap="square" rtlCol="0">
+            <a:spAutoFit/>
+          </a:bodyPr>
+          <a:lstStyle/>
+          <a:p>
+            <a:r>
+              <a:rPr lang="en-US" altLang="zh-CN" sz="1200" i="1" dirty="0">
+                <a:latin typeface="Times New Roman" panose="02020603050405020304" pitchFamily="18" charset="0"/>
+                <a:cs typeface="Times New Roman" panose="02020603050405020304" pitchFamily="18" charset="0"/>
+              </a:rPr>
+              <a:t>Ye, et al, 2025</a:t>
+            </a:r>
+            <a:endParaRPr lang="zh-CN" altLang="en-US" sz="1200" i="1" dirty="0">
+              <a:latin typeface="Times New Roman" panose="02020603050405020304" pitchFamily="18" charset="0"/>
+              <a:cs typeface="Times New Roman" panose="02020603050405020304" pitchFamily="18" charset="0"/>
+            </a:endParaRPr>
+          </a:p>
+        </p:txBody>
+      </p:sp>
+      <mc:AlternateContent xmlns:mc="http://schemas.openxmlformats.org/markup-compatibility/2006">
+        <mc:Choice xmlns:a14="http://schemas.microsoft.com/office/drawing/2010/main" Requires="a14">
+          <p:sp>
+            <p:nvSpPr>
+              <p:cNvPr id="4" name="文本框 3">
+                <a:extLst>
+                  <a:ext uri="{FF2B5EF4-FFF2-40B4-BE49-F238E27FC236}">
+                    <a16:creationId xmlns:a16="http://schemas.microsoft.com/office/drawing/2014/main" id="{CD64D1FB-C7AA-1A56-4F66-0D761D0DD15F}"/>
+                  </a:ext>
+                </a:extLst>
+              </p:cNvPr>
+              <p:cNvSpPr txBox="1"/>
+              <p:nvPr/>
+            </p:nvSpPr>
+            <p:spPr>
+              <a:xfrm>
+                <a:off x="746620" y="1212845"/>
+                <a:ext cx="7650759" cy="618242"/>
+              </a:xfrm>
+              <a:prstGeom prst="rect">
+                <a:avLst/>
+              </a:prstGeom>
+              <a:noFill/>
+              <a:ln w="12700" cap="flat">
+                <a:noFill/>
+                <a:miter lim="400000"/>
+              </a:ln>
+              <a:effectLst/>
+              <a:sp3d/>
+            </p:spPr>
+            <p:style>
+              <a:lnRef idx="0">
+                <a:scrgbClr r="0" g="0" b="0"/>
+              </a:lnRef>
+              <a:fillRef idx="0">
+                <a:scrgbClr r="0" g="0" b="0"/>
+              </a:fillRef>
+              <a:effectRef idx="0">
+                <a:scrgbClr r="0" g="0" b="0"/>
+              </a:effectRef>
+              <a:fontRef idx="none"/>
+            </p:style>
+            <p:txBody>
+              <a:bodyPr rot="0" spcFirstLastPara="1" vertOverflow="overflow" horzOverflow="overflow" vert="horz" wrap="square" lIns="45718" tIns="45718" rIns="45718" bIns="45718" numCol="1" spcCol="38100" rtlCol="0" anchor="t">
+                <a:spAutoFit/>
+              </a:bodyPr>
+              <a:lstStyle/>
+              <a:p>
+                <a:pPr marL="0" marR="0" indent="0" algn="l" defTabSz="914400" rtl="0" fontAlgn="auto" latinLnBrk="0" hangingPunct="0">
+                  <a:lnSpc>
+                    <a:spcPct val="100000"/>
+                  </a:lnSpc>
+                  <a:spcBef>
+                    <a:spcPts val="0"/>
+                  </a:spcBef>
+                  <a:spcAft>
+                    <a:spcPts val="0"/>
+                  </a:spcAft>
+                  <a:buClrTx/>
+                  <a:buSzTx/>
+                  <a:buFontTx/>
+                  <a:buNone/>
+                  <a:tabLst/>
+                </a:pPr>
+                <a14:m>
+                  <m:oMathPara xmlns:m="http://schemas.openxmlformats.org/officeDocument/2006/math">
+                    <m:oMathParaPr>
+                      <m:jc m:val="centerGroup"/>
+                    </m:oMathParaPr>
+                    <m:oMath xmlns:m="http://schemas.openxmlformats.org/officeDocument/2006/math">
+                      <m:f>
+                        <m:fPr>
+                          <m:ctrlPr>
+                            <a:rPr kumimoji="0" lang="en-US" altLang="zh-CN" sz="1800" b="0" i="1" u="none" strike="noStrike" cap="none" spc="0" normalizeH="0" baseline="0" smtClean="0">
+                              <a:ln>
+                                <a:noFill/>
+                              </a:ln>
+                              <a:solidFill>
+                                <a:srgbClr val="000000"/>
+                              </a:solidFill>
+                              <a:effectLst/>
+                              <a:uFillTx/>
+                              <a:latin typeface="Cambria Math" panose="02040503050406030204" pitchFamily="18" charset="0"/>
+                              <a:ea typeface="+mj-ea"/>
+                              <a:cs typeface="+mj-cs"/>
+                              <a:sym typeface="Helvetica"/>
+                            </a:rPr>
+                          </m:ctrlPr>
+                        </m:fPr>
+                        <m:num>
+                          <m:r>
+                            <a:rPr kumimoji="0" lang="en-US" altLang="zh-CN" sz="1800" b="0" i="1" u="none" strike="noStrike" cap="none" spc="0" normalizeH="0" baseline="0" smtClean="0">
+                              <a:ln>
+                                <a:noFill/>
+                              </a:ln>
+                              <a:solidFill>
+                                <a:srgbClr val="000000"/>
+                              </a:solidFill>
+                              <a:effectLst/>
+                              <a:uFillTx/>
+                              <a:latin typeface="Cambria Math" panose="02040503050406030204" pitchFamily="18" charset="0"/>
+                              <a:ea typeface="+mj-ea"/>
+                              <a:cs typeface="+mj-cs"/>
+                              <a:sym typeface="Helvetica"/>
+                            </a:rPr>
+                            <m:t>𝑑𝑢</m:t>
+                          </m:r>
+                        </m:num>
+                        <m:den>
+                          <m:r>
+                            <a:rPr kumimoji="0" lang="en-US" altLang="zh-CN" sz="1800" b="0" i="1" u="none" strike="noStrike" cap="none" spc="0" normalizeH="0" baseline="0" smtClean="0">
+                              <a:ln>
+                                <a:noFill/>
+                              </a:ln>
+                              <a:solidFill>
+                                <a:srgbClr val="000000"/>
+                              </a:solidFill>
+                              <a:effectLst/>
+                              <a:uFillTx/>
+                              <a:latin typeface="Cambria Math" panose="02040503050406030204" pitchFamily="18" charset="0"/>
+                              <a:ea typeface="+mj-ea"/>
+                              <a:cs typeface="+mj-cs"/>
+                              <a:sym typeface="Helvetica"/>
+                            </a:rPr>
+                            <m:t>𝑑𝑥</m:t>
+                          </m:r>
+                        </m:den>
+                      </m:f>
+                      <m:r>
+                        <a:rPr kumimoji="0" lang="en-US" altLang="zh-CN" sz="1800" b="0" i="1" u="none" strike="noStrike" cap="none" spc="0" normalizeH="0" baseline="0" smtClean="0">
+                          <a:ln>
+                            <a:noFill/>
+                          </a:ln>
+                          <a:solidFill>
+                            <a:srgbClr val="000000"/>
+                          </a:solidFill>
+                          <a:effectLst/>
+                          <a:uFillTx/>
+                          <a:latin typeface="Cambria Math" panose="02040503050406030204" pitchFamily="18" charset="0"/>
+                          <a:ea typeface="+mj-ea"/>
+                          <a:cs typeface="+mj-cs"/>
+                          <a:sym typeface="Helvetica"/>
+                        </a:rPr>
+                        <m:t>=</m:t>
+                      </m:r>
+                      <m:func>
+                        <m:funcPr>
+                          <m:ctrlPr>
+                            <a:rPr kumimoji="0" lang="en-US" altLang="zh-CN" sz="1800" b="0" i="1" u="none" strike="noStrike" cap="none" spc="0" normalizeH="0" baseline="0" smtClean="0">
+                              <a:ln>
+                                <a:noFill/>
+                              </a:ln>
+                              <a:solidFill>
+                                <a:srgbClr val="000000"/>
+                              </a:solidFill>
+                              <a:effectLst/>
+                              <a:uFillTx/>
+                              <a:latin typeface="Cambria Math" panose="02040503050406030204" pitchFamily="18" charset="0"/>
+                              <a:ea typeface="+mj-ea"/>
+                              <a:cs typeface="+mj-cs"/>
+                              <a:sym typeface="Helvetica"/>
+                            </a:rPr>
+                          </m:ctrlPr>
+                        </m:funcPr>
+                        <m:fName>
+                          <m:r>
+                            <m:rPr>
+                              <m:sty m:val="p"/>
+                            </m:rPr>
+                            <a:rPr kumimoji="0" lang="en-US" altLang="zh-CN" sz="1800" b="0" i="0" u="none" strike="noStrike" cap="none" spc="0" normalizeH="0" baseline="0" smtClean="0">
+                              <a:ln>
+                                <a:noFill/>
+                              </a:ln>
+                              <a:solidFill>
+                                <a:srgbClr val="000000"/>
+                              </a:solidFill>
+                              <a:effectLst/>
+                              <a:uFillTx/>
+                              <a:latin typeface="Cambria Math" panose="02040503050406030204" pitchFamily="18" charset="0"/>
+                              <a:ea typeface="+mj-ea"/>
+                              <a:cs typeface="+mj-cs"/>
+                              <a:sym typeface="Helvetica"/>
+                            </a:rPr>
+                            <m:t>sin</m:t>
+                          </m:r>
+                        </m:fName>
+                        <m:e>
+                          <m:d>
+                            <m:dPr>
+                              <m:ctrlPr>
+                                <a:rPr kumimoji="0" lang="en-US" altLang="zh-CN" sz="1800" b="0" i="1" u="none" strike="noStrike" cap="none" spc="0" normalizeH="0" baseline="0" smtClean="0">
+                                  <a:ln>
+                                    <a:noFill/>
+                                  </a:ln>
+                                  <a:solidFill>
+                                    <a:srgbClr val="000000"/>
+                                  </a:solidFill>
+                                  <a:effectLst/>
+                                  <a:uFillTx/>
+                                  <a:latin typeface="Cambria Math" panose="02040503050406030204" pitchFamily="18" charset="0"/>
+                                  <a:ea typeface="+mj-ea"/>
+                                  <a:cs typeface="+mj-cs"/>
+                                  <a:sym typeface="Helvetica"/>
+                                </a:rPr>
+                              </m:ctrlPr>
+                            </m:dPr>
+                            <m:e>
+                              <m:r>
+                                <a:rPr kumimoji="0" lang="en-US" altLang="zh-CN" sz="1800" b="0" i="1" u="none" strike="noStrike" cap="none" spc="0" normalizeH="0" baseline="0" smtClean="0">
+                                  <a:ln>
+                                    <a:noFill/>
+                                  </a:ln>
+                                  <a:solidFill>
+                                    <a:srgbClr val="000000"/>
+                                  </a:solidFill>
+                                  <a:effectLst/>
+                                  <a:uFillTx/>
+                                  <a:latin typeface="Cambria Math" panose="02040503050406030204" pitchFamily="18" charset="0"/>
+                                  <a:ea typeface="+mj-ea"/>
+                                  <a:cs typeface="+mj-cs"/>
+                                  <a:sym typeface="Helvetica"/>
+                                </a:rPr>
+                                <m:t>3</m:t>
+                              </m:r>
+                              <m:r>
+                                <a:rPr kumimoji="0" lang="en-US" altLang="zh-CN" sz="1800" b="0" i="1" u="none" strike="noStrike" cap="none" spc="0" normalizeH="0" baseline="0" smtClean="0">
+                                  <a:ln>
+                                    <a:noFill/>
+                                  </a:ln>
+                                  <a:solidFill>
+                                    <a:srgbClr val="000000"/>
+                                  </a:solidFill>
+                                  <a:effectLst/>
+                                  <a:uFillTx/>
+                                  <a:latin typeface="Cambria Math" panose="02040503050406030204" pitchFamily="18" charset="0"/>
+                                  <a:ea typeface="+mj-ea"/>
+                                  <a:cs typeface="+mj-cs"/>
+                                  <a:sym typeface="Helvetica"/>
+                                </a:rPr>
+                                <m:t>𝑥</m:t>
+                              </m:r>
+                            </m:e>
+                          </m:d>
+                        </m:e>
+                      </m:func>
+                      <m:r>
+                        <a:rPr kumimoji="0" lang="en-US" altLang="zh-CN" sz="1800" b="0" i="1" u="none" strike="noStrike" cap="none" spc="0" normalizeH="0" baseline="0" smtClean="0">
+                          <a:ln>
+                            <a:noFill/>
+                          </a:ln>
+                          <a:solidFill>
+                            <a:srgbClr val="000000"/>
+                          </a:solidFill>
+                          <a:effectLst/>
+                          <a:uFillTx/>
+                          <a:latin typeface="Cambria Math" panose="02040503050406030204" pitchFamily="18" charset="0"/>
+                          <a:ea typeface="+mj-ea"/>
+                          <a:cs typeface="+mj-cs"/>
+                          <a:sym typeface="Helvetica"/>
+                        </a:rPr>
+                        <m:t>+1.5</m:t>
+                      </m:r>
+                      <m:r>
+                        <a:rPr kumimoji="0" lang="en-US" altLang="zh-CN" sz="1800" b="0" i="1" u="none" strike="noStrike" cap="none" spc="0" normalizeH="0" baseline="0" smtClean="0">
+                          <a:ln>
+                            <a:noFill/>
+                          </a:ln>
+                          <a:solidFill>
+                            <a:srgbClr val="000000"/>
+                          </a:solidFill>
+                          <a:effectLst/>
+                          <a:uFillTx/>
+                          <a:latin typeface="Cambria Math" panose="02040503050406030204" pitchFamily="18" charset="0"/>
+                          <a:ea typeface="+mj-ea"/>
+                          <a:cs typeface="+mj-cs"/>
+                          <a:sym typeface="Helvetica"/>
+                        </a:rPr>
+                        <m:t>𝑢</m:t>
+                      </m:r>
+                      <m:d>
+                        <m:dPr>
+                          <m:ctrlPr>
+                            <a:rPr kumimoji="0" lang="en-US" altLang="zh-CN" sz="1800" b="0" i="1" u="none" strike="noStrike" cap="none" spc="0" normalizeH="0" baseline="0" smtClean="0">
+                              <a:ln>
+                                <a:noFill/>
+                              </a:ln>
+                              <a:solidFill>
+                                <a:srgbClr val="000000"/>
+                              </a:solidFill>
+                              <a:effectLst/>
+                              <a:uFillTx/>
+                              <a:latin typeface="Cambria Math" panose="02040503050406030204" pitchFamily="18" charset="0"/>
+                              <a:ea typeface="+mj-ea"/>
+                              <a:cs typeface="+mj-cs"/>
+                              <a:sym typeface="Helvetica"/>
+                            </a:rPr>
+                          </m:ctrlPr>
+                        </m:dPr>
+                        <m:e>
+                          <m:r>
+                            <a:rPr kumimoji="0" lang="en-US" altLang="zh-CN" sz="1800" b="0" i="1" u="none" strike="noStrike" cap="none" spc="0" normalizeH="0" baseline="0" smtClean="0">
+                              <a:ln>
+                                <a:noFill/>
+                              </a:ln>
+                              <a:solidFill>
+                                <a:srgbClr val="000000"/>
+                              </a:solidFill>
+                              <a:effectLst/>
+                              <a:uFillTx/>
+                              <a:latin typeface="Cambria Math" panose="02040503050406030204" pitchFamily="18" charset="0"/>
+                              <a:ea typeface="+mj-ea"/>
+                              <a:cs typeface="+mj-cs"/>
+                              <a:sym typeface="Helvetica"/>
+                            </a:rPr>
+                            <m:t>1−</m:t>
+                          </m:r>
+                          <m:r>
+                            <a:rPr kumimoji="0" lang="en-US" altLang="zh-CN" sz="1800" b="0" i="1" u="none" strike="noStrike" cap="none" spc="0" normalizeH="0" baseline="0" smtClean="0">
+                              <a:ln>
+                                <a:noFill/>
+                              </a:ln>
+                              <a:solidFill>
+                                <a:srgbClr val="000000"/>
+                              </a:solidFill>
+                              <a:effectLst/>
+                              <a:uFillTx/>
+                              <a:latin typeface="Cambria Math" panose="02040503050406030204" pitchFamily="18" charset="0"/>
+                              <a:ea typeface="+mj-ea"/>
+                              <a:cs typeface="+mj-cs"/>
+                              <a:sym typeface="Helvetica"/>
+                            </a:rPr>
+                            <m:t>𝑢</m:t>
+                          </m:r>
+                        </m:e>
+                      </m:d>
+                      <m:r>
+                        <a:rPr kumimoji="0" lang="en-US" altLang="zh-CN" sz="1800" b="0" i="1" u="none" strike="noStrike" cap="none" spc="0" normalizeH="0" baseline="0" smtClean="0">
+                          <a:ln>
+                            <a:noFill/>
+                          </a:ln>
+                          <a:solidFill>
+                            <a:srgbClr val="000000"/>
+                          </a:solidFill>
+                          <a:effectLst/>
+                          <a:uFillTx/>
+                          <a:latin typeface="Cambria Math" panose="02040503050406030204" pitchFamily="18" charset="0"/>
+                          <a:ea typeface="+mj-ea"/>
+                          <a:cs typeface="+mj-cs"/>
+                          <a:sym typeface="Helvetica"/>
+                        </a:rPr>
+                        <m:t>, </m:t>
+                      </m:r>
+                      <m:r>
+                        <a:rPr kumimoji="0" lang="en-US" altLang="zh-CN" sz="1800" b="0" i="1" u="none" strike="noStrike" cap="none" spc="0" normalizeH="0" baseline="0" smtClean="0">
+                          <a:ln>
+                            <a:noFill/>
+                          </a:ln>
+                          <a:solidFill>
+                            <a:srgbClr val="000000"/>
+                          </a:solidFill>
+                          <a:effectLst/>
+                          <a:uFillTx/>
+                          <a:latin typeface="Cambria Math" panose="02040503050406030204" pitchFamily="18" charset="0"/>
+                          <a:ea typeface="+mj-ea"/>
+                          <a:cs typeface="+mj-cs"/>
+                          <a:sym typeface="Helvetica"/>
+                        </a:rPr>
+                        <m:t>𝑥</m:t>
+                      </m:r>
+                      <m:r>
+                        <a:rPr kumimoji="0" lang="en-US" altLang="zh-CN" sz="1800" b="0" i="1" u="none" strike="noStrike" cap="none" spc="0" normalizeH="0" baseline="0" smtClean="0">
+                          <a:ln>
+                            <a:noFill/>
+                          </a:ln>
+                          <a:solidFill>
+                            <a:srgbClr val="000000"/>
+                          </a:solidFill>
+                          <a:effectLst/>
+                          <a:uFillTx/>
+                          <a:latin typeface="Cambria Math" panose="02040503050406030204" pitchFamily="18" charset="0"/>
+                          <a:ea typeface="+mj-ea"/>
+                          <a:cs typeface="+mj-cs"/>
+                          <a:sym typeface="Helvetica"/>
+                        </a:rPr>
+                        <m:t>∈[0,1]</m:t>
+                      </m:r>
+                    </m:oMath>
+                  </m:oMathPara>
+                </a14:m>
+                <a:endParaRPr kumimoji="0" lang="zh-CN" altLang="en-US" sz="1800" b="0" i="0" u="none" strike="noStrike" cap="none" spc="0" normalizeH="0" baseline="0" dirty="0">
+                  <a:ln>
+                    <a:noFill/>
+                  </a:ln>
+                  <a:solidFill>
+                    <a:srgbClr val="000000"/>
+                  </a:solidFill>
+                  <a:effectLst/>
+                  <a:uFillTx/>
+                  <a:latin typeface="+mj-lt"/>
+                  <a:ea typeface="+mj-ea"/>
+                  <a:cs typeface="+mj-cs"/>
+                  <a:sym typeface="Helvetica"/>
+                </a:endParaRPr>
+              </a:p>
+            </p:txBody>
+          </p:sp>
+        </mc:Choice>
+        <mc:Fallback>
+          <p:sp>
+            <p:nvSpPr>
+              <p:cNvPr id="4" name="文本框 3">
+                <a:extLst>
+                  <a:ext uri="{FF2B5EF4-FFF2-40B4-BE49-F238E27FC236}">
+                    <a16:creationId xmlns:a16="http://schemas.microsoft.com/office/drawing/2014/main" id="{CD64D1FB-C7AA-1A56-4F66-0D761D0DD15F}"/>
+                  </a:ext>
+                </a:extLst>
+              </p:cNvPr>
+              <p:cNvSpPr txBox="1">
+                <a:spLocks noRot="1" noChangeAspect="1" noMove="1" noResize="1" noEditPoints="1" noAdjustHandles="1" noChangeArrowheads="1" noChangeShapeType="1" noTextEdit="1"/>
+              </p:cNvSpPr>
+              <p:nvPr/>
+            </p:nvSpPr>
+            <p:spPr>
+              <a:xfrm>
+                <a:off x="746620" y="1212845"/>
+                <a:ext cx="7650759" cy="618242"/>
+              </a:xfrm>
+              <a:prstGeom prst="rect">
+                <a:avLst/>
+              </a:prstGeom>
+              <a:blipFill>
+                <a:blip r:embed="rId3"/>
+                <a:stretch>
+                  <a:fillRect/>
+                </a:stretch>
+              </a:blipFill>
+              <a:ln w="12700" cap="flat">
+                <a:noFill/>
+                <a:miter lim="400000"/>
+              </a:ln>
+              <a:effectLst/>
+            </p:spPr>
+            <p:txBody>
+              <a:bodyPr/>
+              <a:lstStyle/>
+              <a:p>
+                <a:r>
+                  <a:rPr lang="zh-CN" altLang="en-US">
+                    <a:noFill/>
+                  </a:rPr>
+                  <a:t> </a:t>
+                </a:r>
+              </a:p>
+            </p:txBody>
+          </p:sp>
+        </mc:Fallback>
+      </mc:AlternateContent>
+      <p:pic>
+        <p:nvPicPr>
+          <p:cNvPr id="8" name="图片 7">
+            <a:extLst>
+              <a:ext uri="{FF2B5EF4-FFF2-40B4-BE49-F238E27FC236}">
+                <a16:creationId xmlns:a16="http://schemas.microsoft.com/office/drawing/2014/main" id="{4D82BD15-A611-7F1F-258D-B764F9C77759}"/>
+              </a:ext>
+            </a:extLst>
+          </p:cNvPr>
+          <p:cNvPicPr>
+            <a:picLocks noChangeAspect="1"/>
+          </p:cNvPicPr>
+          <p:nvPr/>
+        </p:nvPicPr>
+        <p:blipFill>
+          <a:blip r:embed="rId4"/>
+          <a:stretch>
+            <a:fillRect/>
+          </a:stretch>
+        </p:blipFill>
+        <p:spPr>
+          <a:xfrm>
+            <a:off x="854066" y="2384659"/>
+            <a:ext cx="3835919" cy="3068735"/>
+          </a:xfrm>
+          <a:prstGeom prst="rect">
+            <a:avLst/>
+          </a:prstGeom>
+        </p:spPr>
+      </p:pic>
+      <p:pic>
+        <p:nvPicPr>
+          <p:cNvPr id="9" name="图片 8">
+            <a:extLst>
+              <a:ext uri="{FF2B5EF4-FFF2-40B4-BE49-F238E27FC236}">
+                <a16:creationId xmlns:a16="http://schemas.microsoft.com/office/drawing/2014/main" id="{1A45D844-1F72-D0AF-F714-A5720E2B9D47}"/>
+              </a:ext>
+            </a:extLst>
+          </p:cNvPr>
+          <p:cNvPicPr>
+            <a:picLocks noChangeAspect="1"/>
+          </p:cNvPicPr>
+          <p:nvPr/>
+        </p:nvPicPr>
+        <p:blipFill>
+          <a:blip r:embed="rId5"/>
+          <a:stretch>
+            <a:fillRect/>
+          </a:stretch>
+        </p:blipFill>
+        <p:spPr>
+          <a:xfrm>
+            <a:off x="4833820" y="2384659"/>
+            <a:ext cx="3835920" cy="3068736"/>
           </a:xfrm>
           <a:prstGeom prst="rect">
             <a:avLst/>
@@ -18481,21 +21432,900 @@
     </p:spTree>
     <p:extLst>
       <p:ext uri="{BB962C8B-B14F-4D97-AF65-F5344CB8AC3E}">
-        <p14:creationId xmlns:p14="http://schemas.microsoft.com/office/powerpoint/2010/main" val="1587092679"/>
+        <p14:creationId xmlns:p14="http://schemas.microsoft.com/office/powerpoint/2010/main" val="3766072335"/>
       </p:ext>
     </p:extLst>
   </p:cSld>
   <p:clrMapOvr>
     <a:masterClrMapping/>
   </p:clrMapOvr>
-  <mc:AlternateContent xmlns:mc="http://schemas.openxmlformats.org/markup-compatibility/2006" xmlns:p14="http://schemas.microsoft.com/office/powerpoint/2010/main">
-    <mc:Choice Requires="p14">
-      <p:transition spd="slow" p14:dur="2000" advTm="4594"/>
-    </mc:Choice>
-    <mc:Fallback xmlns="">
-      <p:transition spd="slow" advTm="4594"/>
-    </mc:Fallback>
-  </mc:AlternateContent>
+</p:sld>
+</file>
+
+<file path=ppt/slides/slide29.xml><?xml version="1.0" encoding="utf-8"?>
+<p:sld xmlns:a="http://schemas.openxmlformats.org/drawingml/2006/main" xmlns:r="http://schemas.openxmlformats.org/officeDocument/2006/relationships" xmlns:p="http://schemas.openxmlformats.org/presentationml/2006/main">
+  <p:cSld>
+    <p:spTree>
+      <p:nvGrpSpPr>
+        <p:cNvPr id="1" name=""/>
+        <p:cNvGrpSpPr/>
+        <p:nvPr/>
+      </p:nvGrpSpPr>
+      <p:grpSpPr>
+        <a:xfrm>
+          <a:off x="0" y="0"/>
+          <a:ext cx="0" cy="0"/>
+          <a:chOff x="0" y="0"/>
+          <a:chExt cx="0" cy="0"/>
+        </a:xfrm>
+      </p:grpSpPr>
+      <p:sp>
+        <p:nvSpPr>
+          <p:cNvPr id="3" name="Slide Number Placeholder 2">
+            <a:extLst>
+              <a:ext uri="{FF2B5EF4-FFF2-40B4-BE49-F238E27FC236}">
+                <a16:creationId xmlns:a16="http://schemas.microsoft.com/office/drawing/2014/main" id="{3D414C2D-8A45-4ABD-8CDC-4E1AB5D68212}"/>
+              </a:ext>
+            </a:extLst>
+          </p:cNvPr>
+          <p:cNvSpPr>
+            <a:spLocks noGrp="1"/>
+          </p:cNvSpPr>
+          <p:nvPr>
+            <p:ph type="sldNum" sz="quarter" idx="12"/>
+          </p:nvPr>
+        </p:nvSpPr>
+        <p:spPr/>
+        <p:txBody>
+          <a:bodyPr/>
+          <a:lstStyle/>
+          <a:p>
+            <a:pPr algn="l" defTabSz="685800">
+              <a:defRPr/>
+            </a:pPr>
+            <a:fld id="{5DEF7F31-0B8A-474A-B86C-91F381754329}" type="slidenum">
+              <a:rPr lang="en-US" sz="1350">
+                <a:solidFill>
+                  <a:srgbClr val="FFFFFF"/>
+                </a:solidFill>
+                <a:latin typeface="Trebuchet MS"/>
+              </a:rPr>
+              <a:pPr algn="l" defTabSz="685800">
+                <a:defRPr/>
+              </a:pPr>
+              <a:t>29</a:t>
+            </a:fld>
+            <a:endParaRPr lang="en-US" sz="1350" dirty="0">
+              <a:solidFill>
+                <a:srgbClr val="FFFFFF"/>
+              </a:solidFill>
+              <a:latin typeface="Trebuchet MS"/>
+            </a:endParaRPr>
+          </a:p>
+        </p:txBody>
+      </p:sp>
+      <p:sp>
+        <p:nvSpPr>
+          <p:cNvPr id="2" name="圆角矩形 7">
+            <a:extLst>
+              <a:ext uri="{FF2B5EF4-FFF2-40B4-BE49-F238E27FC236}">
+                <a16:creationId xmlns:a16="http://schemas.microsoft.com/office/drawing/2014/main" id="{5B7F6C37-B15C-02AA-C4BA-A6533F3F8CA8}"/>
+              </a:ext>
+            </a:extLst>
+          </p:cNvPr>
+          <p:cNvSpPr/>
+          <p:nvPr/>
+        </p:nvSpPr>
+        <p:spPr>
+          <a:xfrm>
+            <a:off x="0" y="0"/>
+            <a:ext cx="9144000" cy="756138"/>
+          </a:xfrm>
+          <a:prstGeom prst="roundRect">
+            <a:avLst/>
+          </a:prstGeom>
+          <a:solidFill>
+            <a:schemeClr val="bg2"/>
+          </a:solidFill>
+          <a:ln>
+            <a:solidFill>
+              <a:schemeClr val="tx1">
+                <a:lumMod val="50000"/>
+                <a:lumOff val="50000"/>
+              </a:schemeClr>
+            </a:solidFill>
+          </a:ln>
+        </p:spPr>
+        <p:style>
+          <a:lnRef idx="2">
+            <a:schemeClr val="accent1">
+              <a:shade val="50000"/>
+            </a:schemeClr>
+          </a:lnRef>
+          <a:fillRef idx="1">
+            <a:schemeClr val="accent1"/>
+          </a:fillRef>
+          <a:effectRef idx="0">
+            <a:schemeClr val="accent1"/>
+          </a:effectRef>
+          <a:fontRef idx="minor">
+            <a:schemeClr val="lt1"/>
+          </a:fontRef>
+        </p:style>
+        <p:txBody>
+          <a:bodyPr rtlCol="0" anchor="ctr"/>
+          <a:lstStyle/>
+          <a:p>
+            <a:pPr defTabSz="685800">
+              <a:lnSpc>
+                <a:spcPct val="90000"/>
+              </a:lnSpc>
+              <a:defRPr/>
+            </a:pPr>
+            <a:r>
+              <a:rPr lang="en-IN" altLang="zh-CN" sz="2400" b="1" dirty="0">
+                <a:solidFill>
+                  <a:srgbClr val="C00000"/>
+                </a:solidFill>
+                <a:latin typeface="Arial" panose="020B0604020202020204" pitchFamily="34" charset="0"/>
+                <a:cs typeface="Arial" panose="020B0604020202020204" pitchFamily="34" charset="0"/>
+              </a:rPr>
+              <a:t>Example: Inverse problem</a:t>
+            </a:r>
+          </a:p>
+        </p:txBody>
+      </p:sp>
+      <p:sp>
+        <p:nvSpPr>
+          <p:cNvPr id="6" name="文本框 5">
+            <a:extLst>
+              <a:ext uri="{FF2B5EF4-FFF2-40B4-BE49-F238E27FC236}">
+                <a16:creationId xmlns:a16="http://schemas.microsoft.com/office/drawing/2014/main" id="{0666512D-5FF0-A738-8B0F-F2FC16F25EBB}"/>
+              </a:ext>
+            </a:extLst>
+          </p:cNvPr>
+          <p:cNvSpPr txBox="1"/>
+          <p:nvPr/>
+        </p:nvSpPr>
+        <p:spPr>
+          <a:xfrm>
+            <a:off x="8104375" y="6538913"/>
+            <a:ext cx="1130730" cy="276999"/>
+          </a:xfrm>
+          <a:prstGeom prst="rect">
+            <a:avLst/>
+          </a:prstGeom>
+          <a:noFill/>
+        </p:spPr>
+        <p:txBody>
+          <a:bodyPr wrap="square" rtlCol="0">
+            <a:spAutoFit/>
+          </a:bodyPr>
+          <a:lstStyle/>
+          <a:p>
+            <a:r>
+              <a:rPr lang="en-US" altLang="zh-CN" sz="1200" i="1" dirty="0">
+                <a:latin typeface="Times New Roman" panose="02020603050405020304" pitchFamily="18" charset="0"/>
+                <a:cs typeface="Times New Roman" panose="02020603050405020304" pitchFamily="18" charset="0"/>
+              </a:rPr>
+              <a:t>Ye, et al, 2025</a:t>
+            </a:r>
+            <a:endParaRPr lang="zh-CN" altLang="en-US" sz="1200" i="1" dirty="0">
+              <a:latin typeface="Times New Roman" panose="02020603050405020304" pitchFamily="18" charset="0"/>
+              <a:cs typeface="Times New Roman" panose="02020603050405020304" pitchFamily="18" charset="0"/>
+            </a:endParaRPr>
+          </a:p>
+        </p:txBody>
+      </p:sp>
+      <mc:AlternateContent xmlns:mc="http://schemas.openxmlformats.org/markup-compatibility/2006">
+        <mc:Choice xmlns:a14="http://schemas.microsoft.com/office/drawing/2010/main" Requires="a14">
+          <p:sp>
+            <p:nvSpPr>
+              <p:cNvPr id="4" name="文本框 3">
+                <a:extLst>
+                  <a:ext uri="{FF2B5EF4-FFF2-40B4-BE49-F238E27FC236}">
+                    <a16:creationId xmlns:a16="http://schemas.microsoft.com/office/drawing/2014/main" id="{CD64D1FB-C7AA-1A56-4F66-0D761D0DD15F}"/>
+                  </a:ext>
+                </a:extLst>
+              </p:cNvPr>
+              <p:cNvSpPr txBox="1"/>
+              <p:nvPr/>
+            </p:nvSpPr>
+            <p:spPr>
+              <a:xfrm>
+                <a:off x="746620" y="1212845"/>
+                <a:ext cx="7650759" cy="618242"/>
+              </a:xfrm>
+              <a:prstGeom prst="rect">
+                <a:avLst/>
+              </a:prstGeom>
+              <a:noFill/>
+              <a:ln w="12700" cap="flat">
+                <a:noFill/>
+                <a:miter lim="400000"/>
+              </a:ln>
+              <a:effectLst/>
+              <a:sp3d/>
+            </p:spPr>
+            <p:style>
+              <a:lnRef idx="0">
+                <a:scrgbClr r="0" g="0" b="0"/>
+              </a:lnRef>
+              <a:fillRef idx="0">
+                <a:scrgbClr r="0" g="0" b="0"/>
+              </a:fillRef>
+              <a:effectRef idx="0">
+                <a:scrgbClr r="0" g="0" b="0"/>
+              </a:effectRef>
+              <a:fontRef idx="none"/>
+            </p:style>
+            <p:txBody>
+              <a:bodyPr rot="0" spcFirstLastPara="1" vertOverflow="overflow" horzOverflow="overflow" vert="horz" wrap="square" lIns="45718" tIns="45718" rIns="45718" bIns="45718" numCol="1" spcCol="38100" rtlCol="0" anchor="t">
+                <a:spAutoFit/>
+              </a:bodyPr>
+              <a:lstStyle/>
+              <a:p>
+                <a:pPr marL="0" marR="0" indent="0" algn="l" defTabSz="914400" rtl="0" fontAlgn="auto" latinLnBrk="0" hangingPunct="0">
+                  <a:lnSpc>
+                    <a:spcPct val="100000"/>
+                  </a:lnSpc>
+                  <a:spcBef>
+                    <a:spcPts val="0"/>
+                  </a:spcBef>
+                  <a:spcAft>
+                    <a:spcPts val="0"/>
+                  </a:spcAft>
+                  <a:buClrTx/>
+                  <a:buSzTx/>
+                  <a:buFontTx/>
+                  <a:buNone/>
+                  <a:tabLst/>
+                </a:pPr>
+                <a14:m>
+                  <m:oMathPara xmlns:m="http://schemas.openxmlformats.org/officeDocument/2006/math">
+                    <m:oMathParaPr>
+                      <m:jc m:val="centerGroup"/>
+                    </m:oMathParaPr>
+                    <m:oMath xmlns:m="http://schemas.openxmlformats.org/officeDocument/2006/math">
+                      <m:f>
+                        <m:fPr>
+                          <m:ctrlPr>
+                            <a:rPr kumimoji="0" lang="en-US" altLang="zh-CN" sz="1800" b="0" i="1" u="none" strike="noStrike" cap="none" spc="0" normalizeH="0" baseline="0" smtClean="0">
+                              <a:ln>
+                                <a:noFill/>
+                              </a:ln>
+                              <a:solidFill>
+                                <a:srgbClr val="000000"/>
+                              </a:solidFill>
+                              <a:effectLst/>
+                              <a:uFillTx/>
+                              <a:latin typeface="Cambria Math" panose="02040503050406030204" pitchFamily="18" charset="0"/>
+                              <a:ea typeface="+mj-ea"/>
+                              <a:cs typeface="+mj-cs"/>
+                              <a:sym typeface="Helvetica"/>
+                            </a:rPr>
+                          </m:ctrlPr>
+                        </m:fPr>
+                        <m:num>
+                          <m:r>
+                            <a:rPr kumimoji="0" lang="en-US" altLang="zh-CN" sz="1800" b="0" i="1" u="none" strike="noStrike" cap="none" spc="0" normalizeH="0" baseline="0" smtClean="0">
+                              <a:ln>
+                                <a:noFill/>
+                              </a:ln>
+                              <a:solidFill>
+                                <a:srgbClr val="000000"/>
+                              </a:solidFill>
+                              <a:effectLst/>
+                              <a:uFillTx/>
+                              <a:latin typeface="Cambria Math" panose="02040503050406030204" pitchFamily="18" charset="0"/>
+                              <a:ea typeface="+mj-ea"/>
+                              <a:cs typeface="+mj-cs"/>
+                              <a:sym typeface="Helvetica"/>
+                            </a:rPr>
+                            <m:t>𝑑𝑢</m:t>
+                          </m:r>
+                        </m:num>
+                        <m:den>
+                          <m:r>
+                            <a:rPr kumimoji="0" lang="en-US" altLang="zh-CN" sz="1800" b="0" i="1" u="none" strike="noStrike" cap="none" spc="0" normalizeH="0" baseline="0" smtClean="0">
+                              <a:ln>
+                                <a:noFill/>
+                              </a:ln>
+                              <a:solidFill>
+                                <a:srgbClr val="000000"/>
+                              </a:solidFill>
+                              <a:effectLst/>
+                              <a:uFillTx/>
+                              <a:latin typeface="Cambria Math" panose="02040503050406030204" pitchFamily="18" charset="0"/>
+                              <a:ea typeface="+mj-ea"/>
+                              <a:cs typeface="+mj-cs"/>
+                              <a:sym typeface="Helvetica"/>
+                            </a:rPr>
+                            <m:t>𝑑𝑥</m:t>
+                          </m:r>
+                        </m:den>
+                      </m:f>
+                      <m:r>
+                        <a:rPr kumimoji="0" lang="en-US" altLang="zh-CN" sz="1800" b="0" i="1" u="none" strike="noStrike" cap="none" spc="0" normalizeH="0" baseline="0" smtClean="0">
+                          <a:ln>
+                            <a:noFill/>
+                          </a:ln>
+                          <a:solidFill>
+                            <a:srgbClr val="000000"/>
+                          </a:solidFill>
+                          <a:effectLst/>
+                          <a:uFillTx/>
+                          <a:latin typeface="Cambria Math" panose="02040503050406030204" pitchFamily="18" charset="0"/>
+                          <a:ea typeface="+mj-ea"/>
+                          <a:cs typeface="+mj-cs"/>
+                          <a:sym typeface="Helvetica"/>
+                        </a:rPr>
+                        <m:t>=</m:t>
+                      </m:r>
+                      <m:func>
+                        <m:funcPr>
+                          <m:ctrlPr>
+                            <a:rPr kumimoji="0" lang="en-US" altLang="zh-CN" sz="1800" b="0" i="1" u="none" strike="noStrike" cap="none" spc="0" normalizeH="0" baseline="0" smtClean="0">
+                              <a:ln>
+                                <a:noFill/>
+                              </a:ln>
+                              <a:solidFill>
+                                <a:srgbClr val="000000"/>
+                              </a:solidFill>
+                              <a:effectLst/>
+                              <a:uFillTx/>
+                              <a:latin typeface="Cambria Math" panose="02040503050406030204" pitchFamily="18" charset="0"/>
+                              <a:ea typeface="+mj-ea"/>
+                              <a:cs typeface="+mj-cs"/>
+                              <a:sym typeface="Helvetica"/>
+                            </a:rPr>
+                          </m:ctrlPr>
+                        </m:funcPr>
+                        <m:fName>
+                          <m:r>
+                            <m:rPr>
+                              <m:sty m:val="p"/>
+                            </m:rPr>
+                            <a:rPr kumimoji="0" lang="en-US" altLang="zh-CN" sz="1800" b="0" i="0" u="none" strike="noStrike" cap="none" spc="0" normalizeH="0" baseline="0" smtClean="0">
+                              <a:ln>
+                                <a:noFill/>
+                              </a:ln>
+                              <a:solidFill>
+                                <a:srgbClr val="000000"/>
+                              </a:solidFill>
+                              <a:effectLst/>
+                              <a:uFillTx/>
+                              <a:latin typeface="Cambria Math" panose="02040503050406030204" pitchFamily="18" charset="0"/>
+                              <a:ea typeface="+mj-ea"/>
+                              <a:cs typeface="+mj-cs"/>
+                              <a:sym typeface="Helvetica"/>
+                            </a:rPr>
+                            <m:t>sin</m:t>
+                          </m:r>
+                        </m:fName>
+                        <m:e>
+                          <m:d>
+                            <m:dPr>
+                              <m:ctrlPr>
+                                <a:rPr kumimoji="0" lang="en-US" altLang="zh-CN" sz="1800" b="0" i="1" u="none" strike="noStrike" cap="none" spc="0" normalizeH="0" baseline="0" smtClean="0">
+                                  <a:ln>
+                                    <a:noFill/>
+                                  </a:ln>
+                                  <a:solidFill>
+                                    <a:srgbClr val="000000"/>
+                                  </a:solidFill>
+                                  <a:effectLst/>
+                                  <a:uFillTx/>
+                                  <a:latin typeface="Cambria Math" panose="02040503050406030204" pitchFamily="18" charset="0"/>
+                                  <a:ea typeface="+mj-ea"/>
+                                  <a:cs typeface="+mj-cs"/>
+                                  <a:sym typeface="Helvetica"/>
+                                </a:rPr>
+                              </m:ctrlPr>
+                            </m:dPr>
+                            <m:e>
+                              <m:r>
+                                <a:rPr kumimoji="0" lang="en-US" altLang="zh-CN" sz="1800" b="0" i="1" u="none" strike="noStrike" cap="none" spc="0" normalizeH="0" baseline="0" smtClean="0">
+                                  <a:ln>
+                                    <a:noFill/>
+                                  </a:ln>
+                                  <a:solidFill>
+                                    <a:srgbClr val="000000"/>
+                                  </a:solidFill>
+                                  <a:effectLst/>
+                                  <a:uFillTx/>
+                                  <a:latin typeface="Cambria Math" panose="02040503050406030204" pitchFamily="18" charset="0"/>
+                                  <a:ea typeface="+mj-ea"/>
+                                  <a:cs typeface="+mj-cs"/>
+                                  <a:sym typeface="Helvetica"/>
+                                </a:rPr>
+                                <m:t>3</m:t>
+                              </m:r>
+                              <m:r>
+                                <a:rPr kumimoji="0" lang="en-US" altLang="zh-CN" sz="1800" b="0" i="1" u="none" strike="noStrike" cap="none" spc="0" normalizeH="0" baseline="0" smtClean="0">
+                                  <a:ln>
+                                    <a:noFill/>
+                                  </a:ln>
+                                  <a:solidFill>
+                                    <a:srgbClr val="000000"/>
+                                  </a:solidFill>
+                                  <a:effectLst/>
+                                  <a:uFillTx/>
+                                  <a:latin typeface="Cambria Math" panose="02040503050406030204" pitchFamily="18" charset="0"/>
+                                  <a:ea typeface="+mj-ea"/>
+                                  <a:cs typeface="+mj-cs"/>
+                                  <a:sym typeface="Helvetica"/>
+                                </a:rPr>
+                                <m:t>𝑥</m:t>
+                              </m:r>
+                            </m:e>
+                          </m:d>
+                        </m:e>
+                      </m:func>
+                      <m:r>
+                        <a:rPr kumimoji="0" lang="en-US" altLang="zh-CN" sz="1800" b="0" i="1" u="none" strike="noStrike" cap="none" spc="0" normalizeH="0" baseline="0" smtClean="0">
+                          <a:ln>
+                            <a:noFill/>
+                          </a:ln>
+                          <a:solidFill>
+                            <a:srgbClr val="000000"/>
+                          </a:solidFill>
+                          <a:effectLst/>
+                          <a:uFillTx/>
+                          <a:latin typeface="Cambria Math" panose="02040503050406030204" pitchFamily="18" charset="0"/>
+                          <a:ea typeface="+mj-ea"/>
+                          <a:cs typeface="+mj-cs"/>
+                          <a:sym typeface="Helvetica"/>
+                        </a:rPr>
+                        <m:t>+</m:t>
+                      </m:r>
+                      <m:r>
+                        <a:rPr kumimoji="0" lang="en-US" altLang="zh-CN" sz="1800" b="0" i="1" u="none" strike="noStrike" cap="none" spc="0" normalizeH="0" baseline="0" smtClean="0">
+                          <a:ln>
+                            <a:noFill/>
+                          </a:ln>
+                          <a:solidFill>
+                            <a:srgbClr val="FF0000"/>
+                          </a:solidFill>
+                          <a:effectLst/>
+                          <a:uFillTx/>
+                          <a:latin typeface="Cambria Math" panose="02040503050406030204" pitchFamily="18" charset="0"/>
+                          <a:ea typeface="+mj-ea"/>
+                          <a:cs typeface="+mj-cs"/>
+                          <a:sym typeface="Helvetica"/>
+                        </a:rPr>
+                        <m:t>𝑎</m:t>
+                      </m:r>
+                      <m:r>
+                        <a:rPr kumimoji="0" lang="en-US" altLang="zh-CN" sz="1800" b="0" i="1" u="none" strike="noStrike" cap="none" spc="0" normalizeH="0" baseline="0" smtClean="0">
+                          <a:ln>
+                            <a:noFill/>
+                          </a:ln>
+                          <a:solidFill>
+                            <a:srgbClr val="000000"/>
+                          </a:solidFill>
+                          <a:effectLst/>
+                          <a:uFillTx/>
+                          <a:latin typeface="Cambria Math" panose="02040503050406030204" pitchFamily="18" charset="0"/>
+                          <a:ea typeface="+mj-ea"/>
+                          <a:cs typeface="+mj-cs"/>
+                          <a:sym typeface="Helvetica"/>
+                        </a:rPr>
+                        <m:t>𝑢</m:t>
+                      </m:r>
+                      <m:d>
+                        <m:dPr>
+                          <m:ctrlPr>
+                            <a:rPr kumimoji="0" lang="en-US" altLang="zh-CN" sz="1800" b="0" i="1" u="none" strike="noStrike" cap="none" spc="0" normalizeH="0" baseline="0" smtClean="0">
+                              <a:ln>
+                                <a:noFill/>
+                              </a:ln>
+                              <a:solidFill>
+                                <a:srgbClr val="000000"/>
+                              </a:solidFill>
+                              <a:effectLst/>
+                              <a:uFillTx/>
+                              <a:latin typeface="Cambria Math" panose="02040503050406030204" pitchFamily="18" charset="0"/>
+                              <a:ea typeface="+mj-ea"/>
+                              <a:cs typeface="+mj-cs"/>
+                              <a:sym typeface="Helvetica"/>
+                            </a:rPr>
+                          </m:ctrlPr>
+                        </m:dPr>
+                        <m:e>
+                          <m:r>
+                            <a:rPr kumimoji="0" lang="en-US" altLang="zh-CN" sz="1800" b="0" i="1" u="none" strike="noStrike" cap="none" spc="0" normalizeH="0" baseline="0" smtClean="0">
+                              <a:ln>
+                                <a:noFill/>
+                              </a:ln>
+                              <a:solidFill>
+                                <a:srgbClr val="000000"/>
+                              </a:solidFill>
+                              <a:effectLst/>
+                              <a:uFillTx/>
+                              <a:latin typeface="Cambria Math" panose="02040503050406030204" pitchFamily="18" charset="0"/>
+                              <a:ea typeface="+mj-ea"/>
+                              <a:cs typeface="+mj-cs"/>
+                              <a:sym typeface="Helvetica"/>
+                            </a:rPr>
+                            <m:t>1−</m:t>
+                          </m:r>
+                          <m:r>
+                            <a:rPr kumimoji="0" lang="en-US" altLang="zh-CN" sz="1800" b="0" i="1" u="none" strike="noStrike" cap="none" spc="0" normalizeH="0" baseline="0" smtClean="0">
+                              <a:ln>
+                                <a:noFill/>
+                              </a:ln>
+                              <a:solidFill>
+                                <a:srgbClr val="000000"/>
+                              </a:solidFill>
+                              <a:effectLst/>
+                              <a:uFillTx/>
+                              <a:latin typeface="Cambria Math" panose="02040503050406030204" pitchFamily="18" charset="0"/>
+                              <a:ea typeface="+mj-ea"/>
+                              <a:cs typeface="+mj-cs"/>
+                              <a:sym typeface="Helvetica"/>
+                            </a:rPr>
+                            <m:t>𝑢</m:t>
+                          </m:r>
+                        </m:e>
+                      </m:d>
+                      <m:r>
+                        <a:rPr kumimoji="0" lang="en-US" altLang="zh-CN" sz="1800" b="0" i="1" u="none" strike="noStrike" cap="none" spc="0" normalizeH="0" baseline="0" smtClean="0">
+                          <a:ln>
+                            <a:noFill/>
+                          </a:ln>
+                          <a:solidFill>
+                            <a:srgbClr val="000000"/>
+                          </a:solidFill>
+                          <a:effectLst/>
+                          <a:uFillTx/>
+                          <a:latin typeface="Cambria Math" panose="02040503050406030204" pitchFamily="18" charset="0"/>
+                          <a:ea typeface="+mj-ea"/>
+                          <a:cs typeface="+mj-cs"/>
+                          <a:sym typeface="Helvetica"/>
+                        </a:rPr>
+                        <m:t>, </m:t>
+                      </m:r>
+                      <m:r>
+                        <a:rPr kumimoji="0" lang="en-US" altLang="zh-CN" sz="1800" b="0" i="1" u="none" strike="noStrike" cap="none" spc="0" normalizeH="0" baseline="0" smtClean="0">
+                          <a:ln>
+                            <a:noFill/>
+                          </a:ln>
+                          <a:solidFill>
+                            <a:srgbClr val="000000"/>
+                          </a:solidFill>
+                          <a:effectLst/>
+                          <a:uFillTx/>
+                          <a:latin typeface="Cambria Math" panose="02040503050406030204" pitchFamily="18" charset="0"/>
+                          <a:ea typeface="+mj-ea"/>
+                          <a:cs typeface="+mj-cs"/>
+                          <a:sym typeface="Helvetica"/>
+                        </a:rPr>
+                        <m:t>𝑥</m:t>
+                      </m:r>
+                      <m:r>
+                        <a:rPr kumimoji="0" lang="en-US" altLang="zh-CN" sz="1800" b="0" i="1" u="none" strike="noStrike" cap="none" spc="0" normalizeH="0" baseline="0" smtClean="0">
+                          <a:ln>
+                            <a:noFill/>
+                          </a:ln>
+                          <a:solidFill>
+                            <a:srgbClr val="000000"/>
+                          </a:solidFill>
+                          <a:effectLst/>
+                          <a:uFillTx/>
+                          <a:latin typeface="Cambria Math" panose="02040503050406030204" pitchFamily="18" charset="0"/>
+                          <a:ea typeface="+mj-ea"/>
+                          <a:cs typeface="+mj-cs"/>
+                          <a:sym typeface="Helvetica"/>
+                        </a:rPr>
+                        <m:t>∈[0,1]</m:t>
+                      </m:r>
+                    </m:oMath>
+                  </m:oMathPara>
+                </a14:m>
+                <a:endParaRPr kumimoji="0" lang="zh-CN" altLang="en-US" sz="1800" b="0" i="0" u="none" strike="noStrike" cap="none" spc="0" normalizeH="0" baseline="0" dirty="0">
+                  <a:ln>
+                    <a:noFill/>
+                  </a:ln>
+                  <a:solidFill>
+                    <a:srgbClr val="000000"/>
+                  </a:solidFill>
+                  <a:effectLst/>
+                  <a:uFillTx/>
+                  <a:latin typeface="+mj-lt"/>
+                  <a:ea typeface="+mj-ea"/>
+                  <a:cs typeface="+mj-cs"/>
+                  <a:sym typeface="Helvetica"/>
+                </a:endParaRPr>
+              </a:p>
+            </p:txBody>
+          </p:sp>
+        </mc:Choice>
+        <mc:Fallback>
+          <p:sp>
+            <p:nvSpPr>
+              <p:cNvPr id="4" name="文本框 3">
+                <a:extLst>
+                  <a:ext uri="{FF2B5EF4-FFF2-40B4-BE49-F238E27FC236}">
+                    <a16:creationId xmlns:a16="http://schemas.microsoft.com/office/drawing/2014/main" id="{CD64D1FB-C7AA-1A56-4F66-0D761D0DD15F}"/>
+                  </a:ext>
+                </a:extLst>
+              </p:cNvPr>
+              <p:cNvSpPr txBox="1">
+                <a:spLocks noRot="1" noChangeAspect="1" noMove="1" noResize="1" noEditPoints="1" noAdjustHandles="1" noChangeArrowheads="1" noChangeShapeType="1" noTextEdit="1"/>
+              </p:cNvSpPr>
+              <p:nvPr/>
+            </p:nvSpPr>
+            <p:spPr>
+              <a:xfrm>
+                <a:off x="746620" y="1212845"/>
+                <a:ext cx="7650759" cy="618242"/>
+              </a:xfrm>
+              <a:prstGeom prst="rect">
+                <a:avLst/>
+              </a:prstGeom>
+              <a:blipFill>
+                <a:blip r:embed="rId3"/>
+                <a:stretch>
+                  <a:fillRect/>
+                </a:stretch>
+              </a:blipFill>
+              <a:ln w="12700" cap="flat">
+                <a:noFill/>
+                <a:miter lim="400000"/>
+              </a:ln>
+              <a:effectLst/>
+            </p:spPr>
+            <p:txBody>
+              <a:bodyPr/>
+              <a:lstStyle/>
+              <a:p>
+                <a:r>
+                  <a:rPr lang="zh-CN" altLang="en-US">
+                    <a:noFill/>
+                  </a:rPr>
+                  <a:t> </a:t>
+                </a:r>
+              </a:p>
+            </p:txBody>
+          </p:sp>
+        </mc:Fallback>
+      </mc:AlternateContent>
+      <p:pic>
+        <p:nvPicPr>
+          <p:cNvPr id="5" name="Picture 3">
+            <a:extLst>
+              <a:ext uri="{FF2B5EF4-FFF2-40B4-BE49-F238E27FC236}">
+                <a16:creationId xmlns:a16="http://schemas.microsoft.com/office/drawing/2014/main" id="{E75901F3-C77C-AECC-FDE8-3CEA85DED5C9}"/>
+              </a:ext>
+            </a:extLst>
+          </p:cNvPr>
+          <p:cNvPicPr>
+            <a:picLocks noChangeAspect="1" noChangeArrowheads="1"/>
+          </p:cNvPicPr>
+          <p:nvPr/>
+        </p:nvPicPr>
+        <p:blipFill>
+          <a:blip r:embed="rId4">
+            <a:extLst>
+              <a:ext uri="{28A0092B-C50C-407E-A947-70E740481C1C}">
+                <a14:useLocalDpi xmlns:a14="http://schemas.microsoft.com/office/drawing/2010/main" val="0"/>
+              </a:ext>
+            </a:extLst>
+          </a:blip>
+          <a:srcRect/>
+          <a:stretch>
+            <a:fillRect/>
+          </a:stretch>
+        </p:blipFill>
+        <p:spPr bwMode="auto">
+          <a:xfrm>
+            <a:off x="4701312" y="2541435"/>
+            <a:ext cx="3946596" cy="3160769"/>
+          </a:xfrm>
+          <a:prstGeom prst="rect">
+            <a:avLst/>
+          </a:prstGeom>
+          <a:noFill/>
+          <a:ln>
+            <a:noFill/>
+          </a:ln>
+          <a:extLst>
+            <a:ext uri="{909E8E84-426E-40DD-AFC4-6F175D3DCCD1}">
+              <a14:hiddenFill xmlns:a14="http://schemas.microsoft.com/office/drawing/2010/main">
+                <a:solidFill>
+                  <a:srgbClr val="FFFFFF"/>
+                </a:solidFill>
+              </a14:hiddenFill>
+            </a:ext>
+            <a:ext uri="{91240B29-F687-4F45-9708-019B960494DF}">
+              <a14:hiddenLine xmlns:a14="http://schemas.microsoft.com/office/drawing/2010/main" w="9525">
+                <a:solidFill>
+                  <a:srgbClr val="000000"/>
+                </a:solidFill>
+                <a:miter lim="800000"/>
+                <a:headEnd/>
+                <a:tailEnd/>
+              </a14:hiddenLine>
+            </a:ext>
+          </a:extLst>
+        </p:spPr>
+      </p:pic>
+      <p:pic>
+        <p:nvPicPr>
+          <p:cNvPr id="7" name="Picture 4">
+            <a:extLst>
+              <a:ext uri="{FF2B5EF4-FFF2-40B4-BE49-F238E27FC236}">
+                <a16:creationId xmlns:a16="http://schemas.microsoft.com/office/drawing/2014/main" id="{F0764553-D2EA-ADA1-1601-5548057274C6}"/>
+              </a:ext>
+            </a:extLst>
+          </p:cNvPr>
+          <p:cNvPicPr>
+            <a:picLocks noChangeAspect="1" noChangeArrowheads="1"/>
+          </p:cNvPicPr>
+          <p:nvPr/>
+        </p:nvPicPr>
+        <p:blipFill>
+          <a:blip r:embed="rId5">
+            <a:extLst>
+              <a:ext uri="{28A0092B-C50C-407E-A947-70E740481C1C}">
+                <a14:useLocalDpi xmlns:a14="http://schemas.microsoft.com/office/drawing/2010/main" val="0"/>
+              </a:ext>
+            </a:extLst>
+          </a:blip>
+          <a:srcRect/>
+          <a:stretch>
+            <a:fillRect/>
+          </a:stretch>
+        </p:blipFill>
+        <p:spPr bwMode="auto">
+          <a:xfrm>
+            <a:off x="609598" y="2575290"/>
+            <a:ext cx="3833091" cy="3069865"/>
+          </a:xfrm>
+          <a:prstGeom prst="rect">
+            <a:avLst/>
+          </a:prstGeom>
+          <a:noFill/>
+          <a:ln>
+            <a:noFill/>
+          </a:ln>
+          <a:extLst>
+            <a:ext uri="{909E8E84-426E-40DD-AFC4-6F175D3DCCD1}">
+              <a14:hiddenFill xmlns:a14="http://schemas.microsoft.com/office/drawing/2010/main">
+                <a:solidFill>
+                  <a:srgbClr val="FFFFFF"/>
+                </a:solidFill>
+              </a14:hiddenFill>
+            </a:ext>
+            <a:ext uri="{91240B29-F687-4F45-9708-019B960494DF}">
+              <a14:hiddenLine xmlns:a14="http://schemas.microsoft.com/office/drawing/2010/main" w="9525">
+                <a:solidFill>
+                  <a:srgbClr val="000000"/>
+                </a:solidFill>
+                <a:miter lim="800000"/>
+                <a:headEnd/>
+                <a:tailEnd/>
+              </a14:hiddenLine>
+            </a:ext>
+          </a:extLst>
+        </p:spPr>
+      </p:pic>
+    </p:spTree>
+    <p:extLst>
+      <p:ext uri="{BB962C8B-B14F-4D97-AF65-F5344CB8AC3E}">
+        <p14:creationId xmlns:p14="http://schemas.microsoft.com/office/powerpoint/2010/main" val="3720588269"/>
+      </p:ext>
+    </p:extLst>
+  </p:cSld>
+  <p:clrMapOvr>
+    <a:masterClrMapping/>
+  </p:clrMapOvr>
+  <p:timing>
+    <p:tnLst>
+      <p:par>
+        <p:cTn id="1" dur="indefinite" restart="never" nodeType="tmRoot">
+          <p:childTnLst>
+            <p:seq concurrent="1" nextAc="seek">
+              <p:cTn id="2" dur="indefinite" nodeType="mainSeq">
+                <p:childTnLst>
+                  <p:par>
+                    <p:cTn id="3" fill="hold">
+                      <p:stCondLst>
+                        <p:cond delay="indefinite"/>
+                        <p:cond evt="onBegin" delay="0">
+                          <p:tn val="2"/>
+                        </p:cond>
+                      </p:stCondLst>
+                      <p:childTnLst>
+                        <p:par>
+                          <p:cTn id="4" fill="hold">
+                            <p:stCondLst>
+                              <p:cond delay="0"/>
+                            </p:stCondLst>
+                            <p:childTnLst>
+                              <p:par>
+                                <p:cTn id="5" presetID="1" presetClass="entr" presetSubtype="0" fill="hold" nodeType="withEffect">
+                                  <p:stCondLst>
+                                    <p:cond delay="0"/>
+                                  </p:stCondLst>
+                                  <p:childTnLst>
+                                    <p:set>
+                                      <p:cBhvr>
+                                        <p:cTn id="6" dur="1" fill="hold">
+                                          <p:stCondLst>
+                                            <p:cond delay="0"/>
+                                          </p:stCondLst>
+                                        </p:cTn>
+                                        <p:tgtEl>
+                                          <p:spTgt spid="7"/>
+                                        </p:tgtEl>
+                                        <p:attrNameLst>
+                                          <p:attrName>style.visibility</p:attrName>
+                                        </p:attrNameLst>
+                                      </p:cBhvr>
+                                      <p:to>
+                                        <p:strVal val="visible"/>
+                                      </p:to>
+                                    </p:set>
+                                  </p:childTnLst>
+                                </p:cTn>
+                              </p:par>
+                              <p:par>
+                                <p:cTn id="7" presetID="1" presetClass="entr" presetSubtype="0" fill="hold" nodeType="withEffect">
+                                  <p:stCondLst>
+                                    <p:cond delay="0"/>
+                                  </p:stCondLst>
+                                  <p:childTnLst>
+                                    <p:set>
+                                      <p:cBhvr>
+                                        <p:cTn id="8" dur="1" fill="hold">
+                                          <p:stCondLst>
+                                            <p:cond delay="0"/>
+                                          </p:stCondLst>
+                                        </p:cTn>
+                                        <p:tgtEl>
+                                          <p:spTgt spid="5"/>
+                                        </p:tgtEl>
+                                        <p:attrNameLst>
+                                          <p:attrName>style.visibility</p:attrName>
+                                        </p:attrNameLst>
+                                      </p:cBhvr>
+                                      <p:to>
+                                        <p:strVal val="visible"/>
+                                      </p:to>
+                                    </p:set>
+                                  </p:childTnLst>
+                                </p:cTn>
+                              </p:par>
+                            </p:childTnLst>
+                          </p:cTn>
+                        </p:par>
+                      </p:childTnLst>
+                    </p:cTn>
+                  </p:par>
+                </p:childTnLst>
+              </p:cTn>
+              <p:prevCondLst>
+                <p:cond evt="onPrev" delay="0">
+                  <p:tgtEl>
+                    <p:sldTgt/>
+                  </p:tgtEl>
+                </p:cond>
+              </p:prevCondLst>
+              <p:nextCondLst>
+                <p:cond evt="onNext" delay="0">
+                  <p:tgtEl>
+                    <p:sldTgt/>
+                  </p:tgtEl>
+                </p:cond>
+              </p:nextCondLst>
+            </p:seq>
+          </p:childTnLst>
+        </p:cTn>
+      </p:par>
+    </p:tnLst>
+  </p:timing>
 </p:sld>
 </file>
 
@@ -18823,6 +22653,107 @@
     </mc:Choice>
     <mc:Fallback xmlns="">
       <p:transition spd="slow" advTm="12659"/>
+    </mc:Fallback>
+  </mc:AlternateContent>
+</p:sld>
+</file>
+
+<file path=ppt/slides/slide30.xml><?xml version="1.0" encoding="utf-8"?>
+<p:sld xmlns:a="http://schemas.openxmlformats.org/drawingml/2006/main" xmlns:r="http://schemas.openxmlformats.org/officeDocument/2006/relationships" xmlns:p="http://schemas.openxmlformats.org/presentationml/2006/main">
+  <p:cSld>
+    <p:spTree>
+      <p:nvGrpSpPr>
+        <p:cNvPr id="1" name=""/>
+        <p:cNvGrpSpPr/>
+        <p:nvPr/>
+      </p:nvGrpSpPr>
+      <p:grpSpPr>
+        <a:xfrm>
+          <a:off x="0" y="0"/>
+          <a:ext cx="0" cy="0"/>
+          <a:chOff x="0" y="0"/>
+          <a:chExt cx="0" cy="0"/>
+        </a:xfrm>
+      </p:grpSpPr>
+      <p:sp>
+        <p:nvSpPr>
+          <p:cNvPr id="4" name="文本框 3"/>
+          <p:cNvSpPr txBox="1"/>
+          <p:nvPr/>
+        </p:nvSpPr>
+        <p:spPr>
+          <a:xfrm>
+            <a:off x="0" y="2854036"/>
+            <a:ext cx="9144000" cy="646331"/>
+          </a:xfrm>
+          <a:prstGeom prst="rect">
+            <a:avLst/>
+          </a:prstGeom>
+          <a:noFill/>
+        </p:spPr>
+        <p:txBody>
+          <a:bodyPr wrap="square" rtlCol="0">
+            <a:spAutoFit/>
+          </a:bodyPr>
+          <a:lstStyle/>
+          <a:p>
+            <a:pPr algn="ctr"/>
+            <a:r>
+              <a:rPr lang="en-US" sz="3600" b="1" dirty="0">
+                <a:latin typeface="Microsoft YaHei UI" panose="020B0503020204020204" pitchFamily="34" charset="-122"/>
+                <a:ea typeface="Microsoft YaHei UI" panose="020B0503020204020204" pitchFamily="34" charset="-122"/>
+              </a:rPr>
+              <a:t>Thank you!</a:t>
+            </a:r>
+          </a:p>
+        </p:txBody>
+      </p:sp>
+      <p:pic>
+        <p:nvPicPr>
+          <p:cNvPr id="9" name="图片 8"/>
+          <p:cNvPicPr>
+            <a:picLocks noChangeAspect="1"/>
+          </p:cNvPicPr>
+          <p:nvPr/>
+        </p:nvPicPr>
+        <p:blipFill>
+          <a:blip r:embed="rId2" cstate="print">
+            <a:extLst>
+              <a:ext uri="{28A0092B-C50C-407E-A947-70E740481C1C}">
+                <a14:useLocalDpi xmlns:a14="http://schemas.microsoft.com/office/drawing/2010/main" val="0"/>
+              </a:ext>
+            </a:extLst>
+          </a:blip>
+          <a:stretch>
+            <a:fillRect/>
+          </a:stretch>
+        </p:blipFill>
+        <p:spPr>
+          <a:xfrm>
+            <a:off x="8054111" y="5781964"/>
+            <a:ext cx="1076036" cy="1076036"/>
+          </a:xfrm>
+          <a:prstGeom prst="rect">
+            <a:avLst/>
+          </a:prstGeom>
+        </p:spPr>
+      </p:pic>
+    </p:spTree>
+    <p:extLst>
+      <p:ext uri="{BB962C8B-B14F-4D97-AF65-F5344CB8AC3E}">
+        <p14:creationId xmlns:p14="http://schemas.microsoft.com/office/powerpoint/2010/main" val="1587092679"/>
+      </p:ext>
+    </p:extLst>
+  </p:cSld>
+  <p:clrMapOvr>
+    <a:masterClrMapping/>
+  </p:clrMapOvr>
+  <mc:AlternateContent xmlns:mc="http://schemas.openxmlformats.org/markup-compatibility/2006" xmlns:p14="http://schemas.microsoft.com/office/powerpoint/2010/main">
+    <mc:Choice Requires="p14">
+      <p:transition spd="slow" p14:dur="2000" advTm="4594"/>
+    </mc:Choice>
+    <mc:Fallback xmlns="">
+      <p:transition spd="slow" advTm="4594"/>
     </mc:Fallback>
   </mc:AlternateContent>
 </p:sld>
@@ -21591,6 +25522,42 @@
     </mc:Fallback>
   </mc:AlternateContent>
 </p:sld>
+</file>
+
+<file path=ppt/tags/tag1.xml><?xml version="1.0" encoding="utf-8"?>
+<p:tagLst xmlns:a="http://schemas.openxmlformats.org/drawingml/2006/main" xmlns:r="http://schemas.openxmlformats.org/officeDocument/2006/relationships" xmlns:p="http://schemas.openxmlformats.org/presentationml/2006/main">
+  <p:tag name="OUTPUTDPI" val="1200"/>
+  <p:tag name="ORIGINALHEIGHT" val="376.4529"/>
+  <p:tag name="ORIGINALWIDTH" val="4054.743"/>
+  <p:tag name="LATEXADDIN" val="\documentclass{article}&#10;\usepackage[a4paper, total={6in, 8in}]{geometry}&#10;\usepackage{amsmath}&#10;\usepackage{amssymb}&#10;\usepackage{xcolor}&#10;\usepackage{graphicx}&#10;&#10;\pagestyle{empty}&#10;\begin{document}&#10;&#10;&#10;\[ \mathcal{L}(\tilde{\Theta})=\frac{1}{N_{u}} \sum_{i=1}^{N_{u}}\left|u_{\text {target }}^{i}-u_{\tilde{\Theta}}\left(x_{i}^{u}\right)\right|^{2}+\frac{1}{N_{f}} \sum_{i=1}^{N_{f}}\left|\mathcal{F}_{\tilde{\Theta}}\left(x_{i}^{f}\right)\right|^{2}+\text { {\color{red}Interface Loss} } \]&#10;&#10;&#10;\end{document}&#10;"/>
+  <p:tag name="IGUANATEXSIZE" val="20"/>
+  <p:tag name="IGUANATEXCURSOR" val="479"/>
+  <p:tag name="TRANSPARENCY" val="True"/>
+  <p:tag name="LATEXENGINEID" val="0"/>
+  <p:tag name="TEMPFOLDER" val="c:\temp\"/>
+  <p:tag name="LATEXFORMHEIGHT" val="312"/>
+  <p:tag name="LATEXFORMWIDTH" val="384"/>
+  <p:tag name="LATEXFORMWRAP" val="True"/>
+  <p:tag name="BITMAPVECTOR" val="0"/>
+</p:tagLst>
+</file>
+
+<file path=ppt/tags/tag2.xml><?xml version="1.0" encoding="utf-8"?>
+<p:tagLst xmlns:a="http://schemas.openxmlformats.org/drawingml/2006/main" xmlns:r="http://schemas.openxmlformats.org/officeDocument/2006/relationships" xmlns:p="http://schemas.openxmlformats.org/presentationml/2006/main">
+  <p:tag name="OUTPUTDPI" val="1200"/>
+  <p:tag name="ORIGINALHEIGHT" val="1208.099"/>
+  <p:tag name="ORIGINALWIDTH" val="3805.024"/>
+  <p:tag name="LATEXADDIN" val="\documentclass{article}&#10;\usepackage[a4paper, total={6in, 8in}]{geometry}&#10;\usepackage{amsmath}&#10;\usepackage{amssymb}&#10;\usepackage{xcolor}&#10;\usepackage{graphicx}&#10;&#10;\pagestyle{empty}&#10;\begin{document}&#10;&#10;&#10;\underline{cPINNs}: Interface conditions in the `` $q^{\text {th }}&quot;$ subdomain. \newline&#10;&#10;$\mathrm{MSE}_{\text {flux }}=\sum_{\forall q^{+}}\left(\frac{1}{N_{l_{q}}} \sum_{i=1}^{N_{l q}}\left|f_{q}\left(u\left(\mathbf{x}_{l_{q}}^{(i)}\right)\right) \cdot \mathbf{n}-f_{q^{+}}\left(u\left(\mathbf{x}_{l_{q}}^{(i)}\right) \cdot \mathbf{n}\right)\right|^{2}\right)$ \newline&#10;&#10;where $f$ is the flux and $q=1,2, \cdots, N_{s d}$.\newline&#10;&#10;$\operatorname{MSE}_{u_{\text {avg }}}=\sum_{\forall q^{+}}\left(\frac{1}{N_{l_{q}}} \sum_{i=1}^{N_{l_{q}}}\left|u_{\tilde{\Theta}_{q}}\left(\mathbf{x}_{l_{q}}^{(i)}\right)-\left\{\left\{u_{\tilde{\Theta}_{q}}\left(\mathbf{x}_{l_{q}}^{(i)}\right)\right\}\right\}\right|^{2}\right)$&#10;&#10;&#10;\end{document}&#10;"/>
+  <p:tag name="IGUANATEXSIZE" val="20"/>
+  <p:tag name="IGUANATEXCURSOR" val="263"/>
+  <p:tag name="TRANSPARENCY" val="True"/>
+  <p:tag name="LATEXENGINEID" val="0"/>
+  <p:tag name="TEMPFOLDER" val="C:\temp\"/>
+  <p:tag name="LATEXFORMHEIGHT" val="312"/>
+  <p:tag name="LATEXFORMWIDTH" val="384"/>
+  <p:tag name="LATEXFORMWRAP" val="True"/>
+  <p:tag name="BITMAPVECTOR" val="0"/>
+</p:tagLst>
 </file>
 
 <file path=ppt/theme/theme1.xml><?xml version="1.0" encoding="utf-8"?>
